--- a/Pregrado/Trabajo de grado 3/Clases/Presentacion del Curso - Trabajo de Grado 3.pptx
+++ b/Pregrado/Trabajo de grado 3/Clases/Presentacion del Curso - Trabajo de Grado 3.pptx
@@ -3399,6 +3399,24 @@
               </a:rPr>
               <a:t>Martes, 5:00 pm – 6:00 pm</a:t>
             </a:r>
+            <a:r>
+              <a:rPr sz="1500" b="0" i="0">
+                <a:solidFill>
+                  <a:srgbClr val="2B2B2B"/>
+                </a:solidFill>
+                <a:latin typeface="Calibri"/>
+              </a:rPr>
+              <a:t> · inicio efectivo </a:t>
+            </a:r>
+            <a:r>
+              <a:rPr sz="1500" b="1" i="0">
+                <a:solidFill>
+                  <a:srgbClr val="2B2B2B"/>
+                </a:solidFill>
+                <a:latin typeface="Calibri"/>
+              </a:rPr>
+              <a:t>5:10 pm</a:t>
+            </a:r>
           </a:p>
           <a:p>
             <a:pPr>
@@ -3534,41 +3552,6 @@
                 <a:latin typeface="Calibri"/>
               </a:rPr>
               <a:t>.</a:t>
-            </a:r>
-          </a:p>
-        </p:txBody>
-      </p:sp>
-      <p:sp>
-        <p:nvSpPr>
-          <p:cNvPr id="7" name="TextBox 6"/>
-          <p:cNvSpPr txBox="1"/>
-          <p:nvPr/>
-        </p:nvSpPr>
-        <p:spPr>
-          <a:xfrm>
-            <a:off x="2194560" y="6446520"/>
-            <a:ext cx="5943600" cy="274320"/>
-          </a:xfrm>
-          <a:prstGeom prst="rect">
-            <a:avLst/>
-          </a:prstGeom>
-          <a:noFill/>
-        </p:spPr>
-        <p:txBody>
-          <a:bodyPr wrap="square" anchor="t" lIns="0" rIns="0" tIns="0" bIns="0">
-            <a:spAutoFit/>
-          </a:bodyPr>
-          <a:lstStyle/>
-          <a:p>
-            <a:pPr algn="l"/>
-            <a:r>
-              <a:rPr sz="1000" b="1" i="0">
-                <a:solidFill>
-                  <a:srgbClr val="8F989D"/>
-                </a:solidFill>
-                <a:latin typeface="Calibri"/>
-              </a:rPr>
-              <a:t>Inicio 5:10 pm</a:t>
             </a:r>
           </a:p>
         </p:txBody>
@@ -3810,41 +3793,6 @@
           </a:p>
         </p:txBody>
       </p:sp>
-      <p:sp>
-        <p:nvSpPr>
-          <p:cNvPr id="7" name="TextBox 6"/>
-          <p:cNvSpPr txBox="1"/>
-          <p:nvPr/>
-        </p:nvSpPr>
-        <p:spPr>
-          <a:xfrm>
-            <a:off x="2194560" y="6446520"/>
-            <a:ext cx="5943600" cy="274320"/>
-          </a:xfrm>
-          <a:prstGeom prst="rect">
-            <a:avLst/>
-          </a:prstGeom>
-          <a:noFill/>
-        </p:spPr>
-        <p:txBody>
-          <a:bodyPr wrap="square" anchor="t" lIns="0" rIns="0" tIns="0" bIns="0">
-            <a:spAutoFit/>
-          </a:bodyPr>
-          <a:lstStyle/>
-          <a:p>
-            <a:pPr algn="l"/>
-            <a:r>
-              <a:rPr sz="1000" b="1" i="0">
-                <a:solidFill>
-                  <a:srgbClr val="8F989D"/>
-                </a:solidFill>
-                <a:latin typeface="Calibri"/>
-              </a:rPr>
-              <a:t>Inicio 5:10 pm</a:t>
-            </a:r>
-          </a:p>
-        </p:txBody>
-      </p:sp>
     </p:spTree>
   </p:cSld>
   <p:clrMapOvr>
@@ -4127,41 +4075,6 @@
         </p:nvSpPr>
         <p:spPr>
           <a:xfrm>
-            <a:off x="2194560" y="6446520"/>
-            <a:ext cx="5943600" cy="274320"/>
-          </a:xfrm>
-          <a:prstGeom prst="rect">
-            <a:avLst/>
-          </a:prstGeom>
-          <a:noFill/>
-        </p:spPr>
-        <p:txBody>
-          <a:bodyPr wrap="square" anchor="t" lIns="0" rIns="0" tIns="0" bIns="0">
-            <a:spAutoFit/>
-          </a:bodyPr>
-          <a:lstStyle/>
-          <a:p>
-            <a:pPr algn="l"/>
-            <a:r>
-              <a:rPr sz="1000" b="1" i="0">
-                <a:solidFill>
-                  <a:srgbClr val="8F989D"/>
-                </a:solidFill>
-                <a:latin typeface="Calibri"/>
-              </a:rPr>
-              <a:t>Inicio 5:10 pm</a:t>
-            </a:r>
-          </a:p>
-        </p:txBody>
-      </p:sp>
-      <p:sp>
-        <p:nvSpPr>
-          <p:cNvPr id="9" name="TextBox 8"/>
-          <p:cNvSpPr txBox="1"/>
-          <p:nvPr/>
-        </p:nvSpPr>
-        <p:spPr>
-          <a:xfrm>
             <a:off x="11094415" y="6446520"/>
             <a:ext cx="548640" cy="274320"/>
           </a:xfrm>
@@ -4634,41 +4547,6 @@
         </p:nvSpPr>
         <p:spPr>
           <a:xfrm>
-            <a:off x="2194560" y="6446520"/>
-            <a:ext cx="5943600" cy="274320"/>
-          </a:xfrm>
-          <a:prstGeom prst="rect">
-            <a:avLst/>
-          </a:prstGeom>
-          <a:noFill/>
-        </p:spPr>
-        <p:txBody>
-          <a:bodyPr wrap="square" anchor="t" lIns="0" rIns="0" tIns="0" bIns="0">
-            <a:spAutoFit/>
-          </a:bodyPr>
-          <a:lstStyle/>
-          <a:p>
-            <a:pPr algn="l"/>
-            <a:r>
-              <a:rPr sz="1000" b="1" i="0">
-                <a:solidFill>
-                  <a:srgbClr val="8F989D"/>
-                </a:solidFill>
-                <a:latin typeface="Calibri"/>
-              </a:rPr>
-              <a:t>Inicio 5:10 pm</a:t>
-            </a:r>
-          </a:p>
-        </p:txBody>
-      </p:sp>
-      <p:sp>
-        <p:nvSpPr>
-          <p:cNvPr id="11" name="TextBox 10"/>
-          <p:cNvSpPr txBox="1"/>
-          <p:nvPr/>
-        </p:nvSpPr>
-        <p:spPr>
-          <a:xfrm>
             <a:off x="11094415" y="6446520"/>
             <a:ext cx="548640" cy="274320"/>
           </a:xfrm>
@@ -4914,41 +4792,6 @@
         </p:nvSpPr>
         <p:spPr>
           <a:xfrm>
-            <a:off x="2194560" y="6446520"/>
-            <a:ext cx="5943600" cy="274320"/>
-          </a:xfrm>
-          <a:prstGeom prst="rect">
-            <a:avLst/>
-          </a:prstGeom>
-          <a:noFill/>
-        </p:spPr>
-        <p:txBody>
-          <a:bodyPr wrap="square" anchor="t" lIns="0" rIns="0" tIns="0" bIns="0">
-            <a:spAutoFit/>
-          </a:bodyPr>
-          <a:lstStyle/>
-          <a:p>
-            <a:pPr algn="l"/>
-            <a:r>
-              <a:rPr sz="1000" b="1" i="0">
-                <a:solidFill>
-                  <a:srgbClr val="8F989D"/>
-                </a:solidFill>
-                <a:latin typeface="Calibri"/>
-              </a:rPr>
-              <a:t>Inicio 5:10 pm</a:t>
-            </a:r>
-          </a:p>
-        </p:txBody>
-      </p:sp>
-      <p:sp>
-        <p:nvSpPr>
-          <p:cNvPr id="6" name="TextBox 5"/>
-          <p:cNvSpPr txBox="1"/>
-          <p:nvPr/>
-        </p:nvSpPr>
-        <p:spPr>
-          <a:xfrm>
             <a:off x="11094415" y="6446520"/>
             <a:ext cx="548640" cy="274320"/>
           </a:xfrm>
@@ -5645,41 +5488,6 @@
         </p:nvSpPr>
         <p:spPr>
           <a:xfrm>
-            <a:off x="2194560" y="6446520"/>
-            <a:ext cx="5943600" cy="274320"/>
-          </a:xfrm>
-          <a:prstGeom prst="rect">
-            <a:avLst/>
-          </a:prstGeom>
-          <a:noFill/>
-        </p:spPr>
-        <p:txBody>
-          <a:bodyPr wrap="square" anchor="t" lIns="0" rIns="0" tIns="0" bIns="0">
-            <a:spAutoFit/>
-          </a:bodyPr>
-          <a:lstStyle/>
-          <a:p>
-            <a:pPr algn="l"/>
-            <a:r>
-              <a:rPr sz="1000" b="1" i="0">
-                <a:solidFill>
-                  <a:srgbClr val="8F989D"/>
-                </a:solidFill>
-                <a:latin typeface="Calibri"/>
-              </a:rPr>
-              <a:t>Inicio 5:10 pm</a:t>
-            </a:r>
-          </a:p>
-        </p:txBody>
-      </p:sp>
-      <p:sp>
-        <p:nvSpPr>
-          <p:cNvPr id="7" name="TextBox 6"/>
-          <p:cNvSpPr txBox="1"/>
-          <p:nvPr/>
-        </p:nvSpPr>
-        <p:spPr>
-          <a:xfrm>
             <a:off x="11094415" y="6446520"/>
             <a:ext cx="548640" cy="274320"/>
           </a:xfrm>
@@ -6525,41 +6333,6 @@
         </p:nvSpPr>
         <p:spPr>
           <a:xfrm>
-            <a:off x="2194560" y="6446520"/>
-            <a:ext cx="5943600" cy="274320"/>
-          </a:xfrm>
-          <a:prstGeom prst="rect">
-            <a:avLst/>
-          </a:prstGeom>
-          <a:noFill/>
-        </p:spPr>
-        <p:txBody>
-          <a:bodyPr wrap="square" anchor="t" lIns="0" rIns="0" tIns="0" bIns="0">
-            <a:spAutoFit/>
-          </a:bodyPr>
-          <a:lstStyle/>
-          <a:p>
-            <a:pPr algn="l"/>
-            <a:r>
-              <a:rPr sz="1000" b="1" i="0">
-                <a:solidFill>
-                  <a:srgbClr val="8F989D"/>
-                </a:solidFill>
-                <a:latin typeface="Calibri"/>
-              </a:rPr>
-              <a:t>Inicio 5:10 pm</a:t>
-            </a:r>
-          </a:p>
-        </p:txBody>
-      </p:sp>
-      <p:sp>
-        <p:nvSpPr>
-          <p:cNvPr id="20" name="TextBox 19"/>
-          <p:cNvSpPr txBox="1"/>
-          <p:nvPr/>
-        </p:nvSpPr>
-        <p:spPr>
-          <a:xfrm>
             <a:off x="11094415" y="6446520"/>
             <a:ext cx="548640" cy="274320"/>
           </a:xfrm>
@@ -6947,41 +6720,6 @@
         </p:nvSpPr>
         <p:spPr>
           <a:xfrm>
-            <a:off x="2194560" y="6446520"/>
-            <a:ext cx="5943600" cy="274320"/>
-          </a:xfrm>
-          <a:prstGeom prst="rect">
-            <a:avLst/>
-          </a:prstGeom>
-          <a:noFill/>
-        </p:spPr>
-        <p:txBody>
-          <a:bodyPr wrap="square" anchor="t" lIns="0" rIns="0" tIns="0" bIns="0">
-            <a:spAutoFit/>
-          </a:bodyPr>
-          <a:lstStyle/>
-          <a:p>
-            <a:pPr algn="l"/>
-            <a:r>
-              <a:rPr sz="1000" b="1" i="0">
-                <a:solidFill>
-                  <a:srgbClr val="8F989D"/>
-                </a:solidFill>
-                <a:latin typeface="Calibri"/>
-              </a:rPr>
-              <a:t>Inicio 5:10 pm</a:t>
-            </a:r>
-          </a:p>
-        </p:txBody>
-      </p:sp>
-      <p:sp>
-        <p:nvSpPr>
-          <p:cNvPr id="6" name="TextBox 5"/>
-          <p:cNvSpPr txBox="1"/>
-          <p:nvPr/>
-        </p:nvSpPr>
-        <p:spPr>
-          <a:xfrm>
             <a:off x="11094415" y="6446520"/>
             <a:ext cx="548640" cy="274320"/>
           </a:xfrm>
@@ -7440,41 +7178,6 @@
         </p:nvSpPr>
         <p:spPr>
           <a:xfrm>
-            <a:off x="2194560" y="6446520"/>
-            <a:ext cx="5943600" cy="274320"/>
-          </a:xfrm>
-          <a:prstGeom prst="rect">
-            <a:avLst/>
-          </a:prstGeom>
-          <a:noFill/>
-        </p:spPr>
-        <p:txBody>
-          <a:bodyPr wrap="square" anchor="t" lIns="0" rIns="0" tIns="0" bIns="0">
-            <a:spAutoFit/>
-          </a:bodyPr>
-          <a:lstStyle/>
-          <a:p>
-            <a:pPr algn="l"/>
-            <a:r>
-              <a:rPr sz="1000" b="1" i="0">
-                <a:solidFill>
-                  <a:srgbClr val="8F989D"/>
-                </a:solidFill>
-                <a:latin typeface="Calibri"/>
-              </a:rPr>
-              <a:t>Inicio 5:10 pm</a:t>
-            </a:r>
-          </a:p>
-        </p:txBody>
-      </p:sp>
-      <p:sp>
-        <p:nvSpPr>
-          <p:cNvPr id="11" name="TextBox 10"/>
-          <p:cNvSpPr txBox="1"/>
-          <p:nvPr/>
-        </p:nvSpPr>
-        <p:spPr>
-          <a:xfrm>
             <a:off x="11094415" y="6446520"/>
             <a:ext cx="548640" cy="274320"/>
           </a:xfrm>
@@ -7779,7 +7482,7 @@
                 </a:solidFill>
                 <a:latin typeface="Calibri"/>
               </a:rPr>
-              <a:t> (archivo local): `Cursos/Plantilla_APA_CUN_Proyecto de grado.docx`.</a:t>
+              <a:t> (viene en tu carpeta del curso): `Recursos/Plantilla_APA_CUN_Proyecto de grado.docx`.</a:t>
             </a:r>
           </a:p>
           <a:p>
@@ -7804,7 +7507,7 @@
                 </a:solidFill>
                 <a:latin typeface="Calibri"/>
               </a:rPr>
-              <a:t>URL pública Plantilla APA:</a:t>
+              <a:t>Plantilla APA CUN (en tu carpeta):</a:t>
             </a:r>
             <a:r>
               <a:rPr sz="1600" b="0" i="0">
@@ -7813,7 +7516,7 @@
                 </a:solidFill>
                 <a:latin typeface="Calibri"/>
               </a:rPr>
-              <a:t> [URL Drive/Moodle de la Plantilla APA CUN — pendiente]</a:t>
+              <a:t> `Recursos/Plantilla_APA_CUN_Proyecto de grado.docx`</a:t>
             </a:r>
           </a:p>
           <a:p>
@@ -7923,41 +7626,6 @@
       <p:sp>
         <p:nvSpPr>
           <p:cNvPr id="5" name="TextBox 4"/>
-          <p:cNvSpPr txBox="1"/>
-          <p:nvPr/>
-        </p:nvSpPr>
-        <p:spPr>
-          <a:xfrm>
-            <a:off x="2194560" y="6446520"/>
-            <a:ext cx="5943600" cy="274320"/>
-          </a:xfrm>
-          <a:prstGeom prst="rect">
-            <a:avLst/>
-          </a:prstGeom>
-          <a:noFill/>
-        </p:spPr>
-        <p:txBody>
-          <a:bodyPr wrap="square" anchor="t" lIns="0" rIns="0" tIns="0" bIns="0">
-            <a:spAutoFit/>
-          </a:bodyPr>
-          <a:lstStyle/>
-          <a:p>
-            <a:pPr algn="l"/>
-            <a:r>
-              <a:rPr sz="1000" b="1" i="0">
-                <a:solidFill>
-                  <a:srgbClr val="8F989D"/>
-                </a:solidFill>
-                <a:latin typeface="Calibri"/>
-              </a:rPr>
-              <a:t>Inicio 5:10 pm</a:t>
-            </a:r>
-          </a:p>
-        </p:txBody>
-      </p:sp>
-      <p:sp>
-        <p:nvSpPr>
-          <p:cNvPr id="6" name="TextBox 5"/>
           <p:cNvSpPr txBox="1"/>
           <p:nvPr/>
         </p:nvSpPr>

--- a/Pregrado/Trabajo de grado 3/Clases/Presentacion del Curso - Trabajo de Grado 3.pptx
+++ b/Pregrado/Trabajo de grado 3/Clases/Presentacion del Curso - Trabajo de Grado 3.pptx
@@ -6284,7 +6284,7 @@
                 </a:solidFill>
                 <a:latin typeface="Calibri"/>
               </a:rPr>
-              <a:t>EV05 50% + EXAM 50%. Enunciados: Clases/Recursos/ACAs/. Cierre grupos 54466/54467: </a:t>
+              <a:t>EV05 50% + EXAM 50%. Enunciados: Recursos/ACAs/. </a:t>
             </a:r>
             <a:r>
               <a:rPr sz="1200" b="1" i="0">
@@ -6293,6 +6293,78 @@
                 </a:solidFill>
                 <a:latin typeface="Calibri"/>
               </a:rPr>
+              <a:t>EXAM por grupo</a:t>
+            </a:r>
+            <a:r>
+              <a:rPr sz="1200" b="0" i="0">
+                <a:solidFill>
+                  <a:srgbClr val="2B2B2B"/>
+                </a:solidFill>
+                <a:latin typeface="Calibri"/>
+              </a:rPr>
+              <a:t> — 54450: </a:t>
+            </a:r>
+            <a:r>
+              <a:rPr sz="1200" b="1" i="0">
+                <a:solidFill>
+                  <a:srgbClr val="2B2B2B"/>
+                </a:solidFill>
+                <a:latin typeface="Calibri"/>
+              </a:rPr>
+              <a:t>03/11/2026</a:t>
+            </a:r>
+            <a:r>
+              <a:rPr sz="1200" b="0" i="0">
+                <a:solidFill>
+                  <a:srgbClr val="2B2B2B"/>
+                </a:solidFill>
+                <a:latin typeface="Calibri"/>
+              </a:rPr>
+              <a:t> · 54466 y 54467: </a:t>
+            </a:r>
+            <a:r>
+              <a:rPr sz="1200" b="1" i="0">
+                <a:solidFill>
+                  <a:srgbClr val="2B2B2B"/>
+                </a:solidFill>
+                <a:latin typeface="Calibri"/>
+              </a:rPr>
+              <a:t>10/11/2026</a:t>
+            </a:r>
+            <a:r>
+              <a:rPr sz="1200" b="0" i="0">
+                <a:solidFill>
+                  <a:srgbClr val="2B2B2B"/>
+                </a:solidFill>
+                <a:latin typeface="Calibri"/>
+              </a:rPr>
+              <a:t>. (El cierre de notas del curso es posterior: 54450 </a:t>
+            </a:r>
+            <a:r>
+              <a:rPr sz="1200" b="1" i="0">
+                <a:solidFill>
+                  <a:srgbClr val="2B2B2B"/>
+                </a:solidFill>
+                <a:latin typeface="Calibri"/>
+              </a:rPr>
+              <a:t>15/11/2026</a:t>
+            </a:r>
+            <a:r>
+              <a:rPr sz="1200" b="0" i="0">
+                <a:solidFill>
+                  <a:srgbClr val="2B2B2B"/>
+                </a:solidFill>
+                <a:latin typeface="Calibri"/>
+              </a:rPr>
+              <a:t>, 54466/54467 </a:t>
+            </a:r>
+            <a:r>
+              <a:rPr sz="1200" b="1" i="0">
+                <a:solidFill>
+                  <a:srgbClr val="2B2B2B"/>
+                </a:solidFill>
+                <a:latin typeface="Calibri"/>
+              </a:rPr>
               <a:t>22/11/2026</a:t>
             </a:r>
             <a:r>
@@ -6302,25 +6374,7 @@
                 </a:solidFill>
                 <a:latin typeface="Calibri"/>
               </a:rPr>
-              <a:t>; grupo 54450: </a:t>
-            </a:r>
-            <a:r>
-              <a:rPr sz="1200" b="1" i="0">
-                <a:solidFill>
-                  <a:srgbClr val="2B2B2B"/>
-                </a:solidFill>
-                <a:latin typeface="Calibri"/>
-              </a:rPr>
-              <a:t>15/11/2026</a:t>
-            </a:r>
-            <a:r>
-              <a:rPr sz="1200" b="0" i="0">
-                <a:solidFill>
-                  <a:srgbClr val="2B2B2B"/>
-                </a:solidFill>
-                <a:latin typeface="Calibri"/>
-              </a:rPr>
-              <a:t> (EXAM anticipado).</a:t>
+              <a:t>.)</a:t>
             </a:r>
           </a:p>
         </p:txBody>

--- a/Pregrado/Trabajo de grado 3/Clases/Presentacion del Curso - Trabajo de Grado 3.pptx
+++ b/Pregrado/Trabajo de grado 3/Clases/Presentacion del Curso - Trabajo de Grado 3.pptx
@@ -7459,7 +7459,7 @@
                 </a:solidFill>
                 <a:latin typeface="Calibri"/>
               </a:rPr>
-              <a:t>[URL CDigital — campus del curso pendiente]</a:t>
+              <a:t>https://cdigital.cun.edu.co/course/view.php?id=112321</a:t>
             </a:r>
           </a:p>
           <a:p>

--- a/Pregrado/Trabajo de grado 3/Clases/Presentacion del Curso - Trabajo de Grado 3.pptx
+++ b/Pregrado/Trabajo de grado 3/Clases/Presentacion del Curso - Trabajo de Grado 3.pptx
@@ -15,6 +15,7 @@
     <p:sldId id="263" r:id="rId14"/>
     <p:sldId id="264" r:id="rId15"/>
     <p:sldId id="265" r:id="rId16"/>
+    <p:sldId id="266" r:id="rId17"/>
   </p:sldIdLst>
   <p:sldSz cx="12191695" cy="6858000" type="screen4x3"/>
   <p:notesSz cx="6858000" cy="9144000"/>
@@ -3591,6 +3592,459 @@
         <p:spPr>
           <a:xfrm>
             <a:off x="0" y="0"/>
+            <a:ext cx="12191695" cy="1188720"/>
+          </a:xfrm>
+          <a:prstGeom prst="rect">
+            <a:avLst/>
+          </a:prstGeom>
+          <a:solidFill>
+            <a:srgbClr val="0C2340"/>
+          </a:solidFill>
+          <a:ln>
+            <a:noFill/>
+          </a:ln>
+          <a:effectLst/>
+        </p:spPr>
+        <p:style>
+          <a:lnRef idx="1">
+            <a:schemeClr val="accent1"/>
+          </a:lnRef>
+          <a:fillRef idx="3">
+            <a:schemeClr val="accent1"/>
+          </a:fillRef>
+          <a:effectRef idx="2">
+            <a:schemeClr val="accent1"/>
+          </a:effectRef>
+          <a:fontRef idx="minor">
+            <a:schemeClr val="lt1"/>
+          </a:fontRef>
+        </p:style>
+        <p:txBody>
+          <a:bodyPr rtlCol="0" anchor="ctr"/>
+          <a:lstStyle/>
+          <a:p>
+            <a:pPr algn="ctr"/>
+          </a:p>
+        </p:txBody>
+      </p:sp>
+      <p:sp>
+        <p:nvSpPr>
+          <p:cNvPr id="3" name="TextBox 2"/>
+          <p:cNvSpPr txBox="1"/>
+          <p:nvPr/>
+        </p:nvSpPr>
+        <p:spPr>
+          <a:xfrm>
+            <a:off x="640080" y="0"/>
+            <a:ext cx="9082735" cy="1188720"/>
+          </a:xfrm>
+          <a:prstGeom prst="rect">
+            <a:avLst/>
+          </a:prstGeom>
+          <a:noFill/>
+        </p:spPr>
+        <p:txBody>
+          <a:bodyPr wrap="square" anchor="ctr" lIns="0" rIns="0" tIns="0" bIns="0">
+            <a:spAutoFit/>
+          </a:bodyPr>
+          <a:lstStyle/>
+          <a:p>
+            <a:pPr algn="ctr"/>
+            <a:r>
+              <a:rPr sz="2600" b="1" i="0">
+                <a:solidFill>
+                  <a:srgbClr val="FFFFFF"/>
+                </a:solidFill>
+                <a:latin typeface="Calibri"/>
+              </a:rPr>
+              <a:t>RECURSOS</a:t>
+            </a:r>
+          </a:p>
+        </p:txBody>
+      </p:sp>
+      <p:sp>
+        <p:nvSpPr>
+          <p:cNvPr id="4" name="TextBox 3"/>
+          <p:cNvSpPr txBox="1"/>
+          <p:nvPr/>
+        </p:nvSpPr>
+        <p:spPr>
+          <a:xfrm>
+            <a:off x="640080" y="1691639"/>
+            <a:ext cx="10911535" cy="4617720"/>
+          </a:xfrm>
+          <a:prstGeom prst="rect">
+            <a:avLst/>
+          </a:prstGeom>
+          <a:noFill/>
+        </p:spPr>
+        <p:txBody>
+          <a:bodyPr wrap="square" anchor="t" lIns="0" rIns="0" tIns="0" bIns="0">
+            <a:spAutoFit/>
+          </a:bodyPr>
+          <a:lstStyle/>
+          <a:p>
+            <a:pPr>
+              <a:spcAft>
+                <a:spcPts val="1000"/>
+              </a:spcAft>
+            </a:pPr>
+            <a:r>
+              <a:rPr sz="1600" b="0" i="0">
+                <a:solidFill>
+                  <a:srgbClr val="2B2B2B"/>
+                </a:solidFill>
+                <a:latin typeface="Calibri"/>
+              </a:rPr>
+              <a:t>–   </a:t>
+            </a:r>
+            <a:r>
+              <a:rPr sz="1600" b="1" i="0">
+                <a:solidFill>
+                  <a:srgbClr val="2B2B2B"/>
+                </a:solidFill>
+                <a:latin typeface="Calibri"/>
+              </a:rPr>
+              <a:t>Contacto del Docente:</a:t>
+            </a:r>
+            <a:r>
+              <a:rPr sz="1600" b="0" i="0">
+                <a:solidFill>
+                  <a:srgbClr val="2B2B2B"/>
+                </a:solidFill>
+                <a:latin typeface="Calibri"/>
+              </a:rPr>
+              <a:t> julian_castanoe@cun.edu.co</a:t>
+            </a:r>
+          </a:p>
+          <a:p>
+            <a:pPr>
+              <a:spcAft>
+                <a:spcPts val="1000"/>
+              </a:spcAft>
+            </a:pPr>
+            <a:r>
+              <a:rPr sz="1600" b="0" i="0">
+                <a:solidFill>
+                  <a:srgbClr val="2B2B2B"/>
+                </a:solidFill>
+                <a:latin typeface="Calibri"/>
+              </a:rPr>
+              <a:t>–   </a:t>
+            </a:r>
+            <a:r>
+              <a:rPr sz="1600" b="1" i="0">
+                <a:solidFill>
+                  <a:srgbClr val="2B2B2B"/>
+                </a:solidFill>
+                <a:latin typeface="Calibri"/>
+              </a:rPr>
+              <a:t>CDigital (campus del curso):</a:t>
+            </a:r>
+            <a:r>
+              <a:rPr sz="1600" b="0" i="0">
+                <a:solidFill>
+                  <a:srgbClr val="2B2B2B"/>
+                </a:solidFill>
+                <a:latin typeface="Calibri"/>
+              </a:rPr>
+              <a:t> </a:t>
+            </a:r>
+            <a:r>
+              <a:rPr sz="1600" b="1" i="0">
+                <a:solidFill>
+                  <a:srgbClr val="2B2B2B"/>
+                </a:solidFill>
+                <a:latin typeface="Calibri"/>
+              </a:rPr>
+              <a:t>https://cdigital.cun.edu.co/course/view.php?id=112321</a:t>
+            </a:r>
+          </a:p>
+          <a:p>
+            <a:pPr>
+              <a:spcAft>
+                <a:spcPts val="1000"/>
+              </a:spcAft>
+            </a:pPr>
+            <a:r>
+              <a:rPr sz="1600" b="0" i="0">
+                <a:solidFill>
+                  <a:srgbClr val="2B2B2B"/>
+                </a:solidFill>
+                <a:latin typeface="Calibri"/>
+              </a:rPr>
+              <a:t>–   </a:t>
+            </a:r>
+            <a:r>
+              <a:rPr sz="1600" b="1" i="0">
+                <a:solidFill>
+                  <a:srgbClr val="2B2B2B"/>
+                </a:solidFill>
+                <a:latin typeface="Calibri"/>
+              </a:rPr>
+              <a:t>Google Meet (mismo enlace toda la serie):</a:t>
+            </a:r>
+            <a:r>
+              <a:rPr sz="1600" b="0" i="0">
+                <a:solidFill>
+                  <a:srgbClr val="2B2B2B"/>
+                </a:solidFill>
+                <a:latin typeface="Calibri"/>
+              </a:rPr>
+              <a:t> </a:t>
+            </a:r>
+            <a:r>
+              <a:rPr sz="1600" b="1" i="0">
+                <a:solidFill>
+                  <a:srgbClr val="2B2B2B"/>
+                </a:solidFill>
+                <a:latin typeface="Calibri"/>
+              </a:rPr>
+              <a:t>[URL Meet — mismo enlace toda la serie · Trabajo de Grado 3]</a:t>
+            </a:r>
+          </a:p>
+          <a:p>
+            <a:pPr>
+              <a:spcAft>
+                <a:spcPts val="1000"/>
+              </a:spcAft>
+            </a:pPr>
+            <a:r>
+              <a:rPr sz="1600" b="0" i="0">
+                <a:solidFill>
+                  <a:srgbClr val="2B2B2B"/>
+                </a:solidFill>
+                <a:latin typeface="Calibri"/>
+              </a:rPr>
+              <a:t>–   </a:t>
+            </a:r>
+            <a:r>
+              <a:rPr sz="1600" b="1" i="0">
+                <a:solidFill>
+                  <a:srgbClr val="2B2B2B"/>
+                </a:solidFill>
+                <a:latin typeface="Calibri"/>
+              </a:rPr>
+              <a:t>Plantilla APA CUN – Proyecto de Grado</a:t>
+            </a:r>
+            <a:r>
+              <a:rPr sz="1600" b="0" i="0">
+                <a:solidFill>
+                  <a:srgbClr val="2B2B2B"/>
+                </a:solidFill>
+                <a:latin typeface="Calibri"/>
+              </a:rPr>
+              <a:t> (viene en tu carpeta del curso): `Recursos/Plantilla_APA_CUN_Proyecto de grado.docx`.</a:t>
+            </a:r>
+          </a:p>
+          <a:p>
+            <a:pPr>
+              <a:spcAft>
+                <a:spcPts val="1000"/>
+              </a:spcAft>
+            </a:pPr>
+            <a:r>
+              <a:rPr sz="1600" b="0" i="0">
+                <a:solidFill>
+                  <a:srgbClr val="2B2B2B"/>
+                </a:solidFill>
+                <a:latin typeface="Calibri"/>
+              </a:rPr>
+              <a:t>–   </a:t>
+            </a:r>
+            <a:r>
+              <a:rPr sz="1600" b="1" i="0">
+                <a:solidFill>
+                  <a:srgbClr val="2B2B2B"/>
+                </a:solidFill>
+                <a:latin typeface="Calibri"/>
+              </a:rPr>
+              <a:t>Plantilla APA CUN (en tu carpeta):</a:t>
+            </a:r>
+            <a:r>
+              <a:rPr sz="1600" b="0" i="0">
+                <a:solidFill>
+                  <a:srgbClr val="2B2B2B"/>
+                </a:solidFill>
+                <a:latin typeface="Calibri"/>
+              </a:rPr>
+              <a:t> `Recursos/Plantilla_APA_CUN_Proyecto de grado.docx`</a:t>
+            </a:r>
+          </a:p>
+          <a:p>
+            <a:pPr>
+              <a:spcAft>
+                <a:spcPts val="1000"/>
+              </a:spcAft>
+            </a:pPr>
+            <a:r>
+              <a:rPr sz="1600" b="0" i="0">
+                <a:solidFill>
+                  <a:srgbClr val="2B2B2B"/>
+                </a:solidFill>
+                <a:latin typeface="Calibri"/>
+              </a:rPr>
+              <a:t>–   </a:t>
+            </a:r>
+            <a:r>
+              <a:rPr sz="1600" b="1" i="0">
+                <a:solidFill>
+                  <a:srgbClr val="2B2B2B"/>
+                </a:solidFill>
+                <a:latin typeface="Calibri"/>
+              </a:rPr>
+              <a:t>Enunciados ACA / cortes (estudiantes):</a:t>
+            </a:r>
+            <a:r>
+              <a:rPr sz="1600" b="0" i="0">
+                <a:solidFill>
+                  <a:srgbClr val="2B2B2B"/>
+                </a:solidFill>
+                <a:latin typeface="Calibri"/>
+              </a:rPr>
+              <a:t> `Clases/Recursos/ACAs/`.</a:t>
+            </a:r>
+          </a:p>
+          <a:p>
+            <a:pPr>
+              <a:spcAft>
+                <a:spcPts val="1000"/>
+              </a:spcAft>
+            </a:pPr>
+            <a:r>
+              <a:rPr sz="1600" b="0" i="0">
+                <a:solidFill>
+                  <a:srgbClr val="2B2B2B"/>
+                </a:solidFill>
+                <a:latin typeface="Calibri"/>
+              </a:rPr>
+              <a:t>–   </a:t>
+            </a:r>
+            <a:r>
+              <a:rPr sz="1600" b="1" i="0">
+                <a:solidFill>
+                  <a:srgbClr val="2B2B2B"/>
+                </a:solidFill>
+                <a:latin typeface="Calibri"/>
+              </a:rPr>
+              <a:t>Repositorio:</a:t>
+            </a:r>
+            <a:r>
+              <a:rPr sz="1600" b="0" i="0">
+                <a:solidFill>
+                  <a:srgbClr val="2B2B2B"/>
+                </a:solidFill>
+                <a:latin typeface="Calibri"/>
+              </a:rPr>
+              <a:t> carga institucional del trabajo de grado al finalizar la sustentación.</a:t>
+            </a:r>
+          </a:p>
+          <a:p>
+            <a:pPr>
+              <a:spcAft>
+                <a:spcPts val="1000"/>
+              </a:spcAft>
+            </a:pPr>
+            <a:r>
+              <a:rPr sz="1600" b="0" i="0">
+                <a:solidFill>
+                  <a:srgbClr val="2B2B2B"/>
+                </a:solidFill>
+                <a:latin typeface="Calibri"/>
+              </a:rPr>
+              <a:t>–   </a:t>
+            </a:r>
+            <a:r>
+              <a:rPr sz="1600" b="1" i="0">
+                <a:solidFill>
+                  <a:srgbClr val="2B2B2B"/>
+                </a:solidFill>
+                <a:latin typeface="Calibri"/>
+              </a:rPr>
+              <a:t>Entregas y notas oficiales:</a:t>
+            </a:r>
+            <a:r>
+              <a:rPr sz="1600" b="0" i="0">
+                <a:solidFill>
+                  <a:srgbClr val="2B2B2B"/>
+                </a:solidFill>
+                <a:latin typeface="Calibri"/>
+              </a:rPr>
+              <a:t> solo por CDigital del curso.</a:t>
+            </a:r>
+          </a:p>
+        </p:txBody>
+      </p:sp>
+      <p:sp>
+        <p:nvSpPr>
+          <p:cNvPr id="5" name="TextBox 4"/>
+          <p:cNvSpPr txBox="1"/>
+          <p:nvPr/>
+        </p:nvSpPr>
+        <p:spPr>
+          <a:xfrm>
+            <a:off x="11094415" y="6446520"/>
+            <a:ext cx="548640" cy="274320"/>
+          </a:xfrm>
+          <a:prstGeom prst="rect">
+            <a:avLst/>
+          </a:prstGeom>
+          <a:noFill/>
+        </p:spPr>
+        <p:txBody>
+          <a:bodyPr wrap="square" anchor="t" lIns="0" rIns="0" tIns="0" bIns="0">
+            <a:spAutoFit/>
+          </a:bodyPr>
+          <a:lstStyle/>
+          <a:p>
+            <a:pPr algn="r"/>
+            <a:r>
+              <a:rPr sz="1000" b="1" i="0">
+                <a:solidFill>
+                  <a:srgbClr val="8F989D"/>
+                </a:solidFill>
+                <a:latin typeface="Calibri"/>
+              </a:rPr>
+              <a:t>10</a:t>
+            </a:r>
+          </a:p>
+        </p:txBody>
+      </p:sp>
+    </p:spTree>
+  </p:cSld>
+  <p:clrMapOvr>
+    <a:masterClrMapping/>
+  </p:clrMapOvr>
+</p:sld>
+</file>
+
+<file path=ppt/slides/slide11.xml><?xml version="1.0" encoding="utf-8"?>
+<p:sld xmlns:a="http://schemas.openxmlformats.org/drawingml/2006/main" xmlns:p="http://schemas.openxmlformats.org/presentationml/2006/main" xmlns:r="http://schemas.openxmlformats.org/officeDocument/2006/relationships">
+  <p:cSld>
+    <p:bg>
+      <p:bgPr>
+        <a:solidFill>
+          <a:srgbClr val="FFFFFF"/>
+        </a:solidFill>
+        <a:effectLst/>
+      </p:bgPr>
+    </p:bg>
+    <p:spTree>
+      <p:nvGrpSpPr>
+        <p:cNvPr id="1" name=""/>
+        <p:cNvGrpSpPr/>
+        <p:nvPr/>
+      </p:nvGrpSpPr>
+      <p:grpSpPr/>
+      <p:sp>
+        <p:nvSpPr>
+          <p:cNvPr id="2" name="Rectangle 1"/>
+          <p:cNvSpPr/>
+          <p:nvPr/>
+        </p:nvSpPr>
+        <p:spPr>
+          <a:xfrm>
+            <a:off x="0" y="0"/>
             <a:ext cx="12191695" cy="164592"/>
           </a:xfrm>
           <a:prstGeom prst="rect">
@@ -5615,7 +6069,7 @@
                 </a:solidFill>
                 <a:latin typeface="Calibri"/>
               </a:rPr>
-              <a:t>EVALUACIÓN — CORTE ÚNICO 100%</a:t>
+              <a:t>EVALUACIÓN — TRES CORTES (ART. 52)</a:t>
             </a:r>
           </a:p>
         </p:txBody>
@@ -5682,7 +6136,7 @@
         <p:spPr>
           <a:xfrm>
             <a:off x="640080" y="2011679"/>
-            <a:ext cx="5355183" cy="658368"/>
+            <a:ext cx="3503066" cy="658368"/>
           </a:xfrm>
           <a:prstGeom prst="rect">
             <a:avLst/>
@@ -5726,7 +6180,7 @@
         <p:spPr>
           <a:xfrm>
             <a:off x="713231" y="2084831"/>
-            <a:ext cx="5208879" cy="512064"/>
+            <a:ext cx="3356762" cy="512064"/>
           </a:xfrm>
           <a:prstGeom prst="rect">
             <a:avLst/>
@@ -5747,7 +6201,7 @@
                 </a:solidFill>
                 <a:latin typeface="Calibri"/>
               </a:rPr>
-              <a:t>EV05  ·  50%</a:t>
+              <a:t>Corte 1  ·  30%</a:t>
             </a:r>
           </a:p>
         </p:txBody>
@@ -5761,7 +6215,7 @@
         <p:spPr>
           <a:xfrm>
             <a:off x="640080" y="2670048"/>
-            <a:ext cx="5355183" cy="2221991"/>
+            <a:ext cx="3503066" cy="2221991"/>
           </a:xfrm>
           <a:prstGeom prst="rect">
             <a:avLst/>
@@ -5805,7 +6259,7 @@
         <p:spPr>
           <a:xfrm>
             <a:off x="749808" y="2880359"/>
-            <a:ext cx="5135727" cy="822960"/>
+            <a:ext cx="3283610" cy="822960"/>
           </a:xfrm>
           <a:prstGeom prst="rect">
             <a:avLst/>
@@ -5842,7 +6296,7 @@
                 </a:solidFill>
                 <a:latin typeface="Calibri"/>
               </a:rPr>
-              <a:t>10/08/2026</a:t>
+              <a:t>18/08/2026</a:t>
             </a:r>
           </a:p>
         </p:txBody>
@@ -5856,7 +6310,7 @@
         <p:spPr>
           <a:xfrm>
             <a:off x="960119" y="3794759"/>
-            <a:ext cx="4715103" cy="27432"/>
+            <a:ext cx="2862986" cy="27432"/>
           </a:xfrm>
           <a:prstGeom prst="rect">
             <a:avLst/>
@@ -5900,7 +6354,7 @@
         <p:spPr>
           <a:xfrm>
             <a:off x="749808" y="3977639"/>
-            <a:ext cx="5135727" cy="822960"/>
+            <a:ext cx="3283610" cy="822960"/>
           </a:xfrm>
           <a:prstGeom prst="rect">
             <a:avLst/>
@@ -5937,7 +6391,7 @@
                 </a:solidFill>
                 <a:latin typeface="Calibri"/>
               </a:rPr>
-              <a:t>22/09/2026</a:t>
+              <a:t>15/09/2026</a:t>
             </a:r>
           </a:p>
         </p:txBody>
@@ -5950,8 +6404,8 @@
         </p:nvSpPr>
         <p:spPr>
           <a:xfrm>
-            <a:off x="6196431" y="2011679"/>
-            <a:ext cx="5355183" cy="658368"/>
+            <a:off x="4344314" y="2011679"/>
+            <a:ext cx="3503066" cy="658368"/>
           </a:xfrm>
           <a:prstGeom prst="rect">
             <a:avLst/>
@@ -5994,8 +6448,8 @@
         </p:nvSpPr>
         <p:spPr>
           <a:xfrm>
-            <a:off x="6269583" y="2084831"/>
-            <a:ext cx="5208879" cy="512064"/>
+            <a:off x="4417466" y="2084831"/>
+            <a:ext cx="3356762" cy="512064"/>
           </a:xfrm>
           <a:prstGeom prst="rect">
             <a:avLst/>
@@ -6016,7 +6470,7 @@
                 </a:solidFill>
                 <a:latin typeface="Calibri"/>
               </a:rPr>
-              <a:t>EXAM  ·  50%</a:t>
+              <a:t>Corte 2  ·  30%</a:t>
             </a:r>
           </a:p>
         </p:txBody>
@@ -6029,8 +6483,8 @@
         </p:nvSpPr>
         <p:spPr>
           <a:xfrm>
-            <a:off x="6196431" y="2670048"/>
-            <a:ext cx="5355183" cy="2221991"/>
+            <a:off x="4344314" y="2670048"/>
+            <a:ext cx="3503066" cy="2221991"/>
           </a:xfrm>
           <a:prstGeom prst="rect">
             <a:avLst/>
@@ -6073,8 +6527,8 @@
         </p:nvSpPr>
         <p:spPr>
           <a:xfrm>
-            <a:off x="6306159" y="2880359"/>
-            <a:ext cx="5135727" cy="822960"/>
+            <a:off x="4454042" y="2880359"/>
+            <a:ext cx="3283610" cy="822960"/>
           </a:xfrm>
           <a:prstGeom prst="rect">
             <a:avLst/>
@@ -6111,7 +6565,7 @@
                 </a:solidFill>
                 <a:latin typeface="Calibri"/>
               </a:rPr>
-              <a:t>29/09/2026</a:t>
+              <a:t>22/09/2026</a:t>
             </a:r>
           </a:p>
         </p:txBody>
@@ -6124,8 +6578,8 @@
         </p:nvSpPr>
         <p:spPr>
           <a:xfrm>
-            <a:off x="6516471" y="3794759"/>
-            <a:ext cx="4715103" cy="27432"/>
+            <a:off x="4664354" y="3794759"/>
+            <a:ext cx="2862986" cy="27432"/>
           </a:xfrm>
           <a:prstGeom prst="rect">
             <a:avLst/>
@@ -6168,8 +6622,8 @@
         </p:nvSpPr>
         <p:spPr>
           <a:xfrm>
-            <a:off x="6306159" y="3977639"/>
-            <a:ext cx="5135727" cy="822960"/>
+            <a:off x="4454042" y="3977639"/>
+            <a:ext cx="3283610" cy="822960"/>
           </a:xfrm>
           <a:prstGeom prst="rect">
             <a:avLst/>
@@ -6206,27 +6660,27 @@
                 </a:solidFill>
                 <a:latin typeface="Calibri"/>
               </a:rPr>
-              <a:t>10/11/2026</a:t>
-            </a:r>
-          </a:p>
-        </p:txBody>
-      </p:sp>
-      <p:sp>
-        <p:nvSpPr>
-          <p:cNvPr id="17" name="Rounded Rectangle 16"/>
+              <a:t>13/10/2026</a:t>
+            </a:r>
+          </a:p>
+        </p:txBody>
+      </p:sp>
+      <p:sp>
+        <p:nvSpPr>
+          <p:cNvPr id="17" name="Rectangle 16"/>
           <p:cNvSpPr/>
           <p:nvPr/>
         </p:nvSpPr>
         <p:spPr>
           <a:xfrm>
-            <a:off x="640080" y="5056631"/>
-            <a:ext cx="10911535" cy="640080"/>
-          </a:xfrm>
-          <a:prstGeom prst="roundRect">
+            <a:off x="8048548" y="2011679"/>
+            <a:ext cx="3503066" cy="658368"/>
+          </a:xfrm>
+          <a:prstGeom prst="rect">
             <a:avLst/>
           </a:prstGeom>
           <a:solidFill>
-            <a:srgbClr val="FDECD8"/>
+            <a:srgbClr val="4A7FB5"/>
           </a:solidFill>
           <a:ln>
             <a:noFill/>
@@ -6263,8 +6717,8 @@
         </p:nvSpPr>
         <p:spPr>
           <a:xfrm>
-            <a:off x="822959" y="5166359"/>
-            <a:ext cx="10545775" cy="457200"/>
+            <a:off x="8121700" y="2084831"/>
+            <a:ext cx="3356762" cy="512064"/>
           </a:xfrm>
           <a:prstGeom prst="rect">
             <a:avLst/>
@@ -6277,6 +6731,275 @@
           </a:bodyPr>
           <a:lstStyle/>
           <a:p>
+            <a:pPr algn="ctr"/>
+            <a:r>
+              <a:rPr sz="1400" b="1" i="0">
+                <a:solidFill>
+                  <a:srgbClr val="FFFFFF"/>
+                </a:solidFill>
+                <a:latin typeface="Calibri"/>
+              </a:rPr>
+              <a:t>Corte 3  ·  40%</a:t>
+            </a:r>
+          </a:p>
+        </p:txBody>
+      </p:sp>
+      <p:sp>
+        <p:nvSpPr>
+          <p:cNvPr id="19" name="Rectangle 18"/>
+          <p:cNvSpPr/>
+          <p:nvPr/>
+        </p:nvSpPr>
+        <p:spPr>
+          <a:xfrm>
+            <a:off x="8048548" y="2670048"/>
+            <a:ext cx="3503066" cy="2221991"/>
+          </a:xfrm>
+          <a:prstGeom prst="rect">
+            <a:avLst/>
+          </a:prstGeom>
+          <a:solidFill>
+            <a:srgbClr val="F2F2F2"/>
+          </a:solidFill>
+          <a:ln>
+            <a:noFill/>
+          </a:ln>
+          <a:effectLst/>
+        </p:spPr>
+        <p:style>
+          <a:lnRef idx="1">
+            <a:schemeClr val="accent1"/>
+          </a:lnRef>
+          <a:fillRef idx="3">
+            <a:schemeClr val="accent1"/>
+          </a:fillRef>
+          <a:effectRef idx="2">
+            <a:schemeClr val="accent1"/>
+          </a:effectRef>
+          <a:fontRef idx="minor">
+            <a:schemeClr val="lt1"/>
+          </a:fontRef>
+        </p:style>
+        <p:txBody>
+          <a:bodyPr rtlCol="0" anchor="ctr"/>
+          <a:lstStyle/>
+          <a:p>
+            <a:pPr algn="ctr"/>
+          </a:p>
+        </p:txBody>
+      </p:sp>
+      <p:sp>
+        <p:nvSpPr>
+          <p:cNvPr id="20" name="TextBox 19"/>
+          <p:cNvSpPr txBox="1"/>
+          <p:nvPr/>
+        </p:nvSpPr>
+        <p:spPr>
+          <a:xfrm>
+            <a:off x="8158276" y="2880359"/>
+            <a:ext cx="3283610" cy="822960"/>
+          </a:xfrm>
+          <a:prstGeom prst="rect">
+            <a:avLst/>
+          </a:prstGeom>
+          <a:noFill/>
+        </p:spPr>
+        <p:txBody>
+          <a:bodyPr wrap="square" anchor="t" lIns="0" rIns="0" tIns="0" bIns="0">
+            <a:spAutoFit/>
+          </a:bodyPr>
+          <a:lstStyle/>
+          <a:p>
+            <a:pPr algn="ctr"/>
+            <a:r>
+              <a:rPr sz="1100" b="1" i="0">
+                <a:solidFill>
+                  <a:srgbClr val="8F989D"/>
+                </a:solidFill>
+                <a:latin typeface="Calibri"/>
+              </a:rPr>
+              <a:t>INICIO</a:t>
+            </a:r>
+          </a:p>
+          <a:p>
+            <a:pPr algn="ctr">
+              <a:spcBef>
+                <a:spcPts val="400"/>
+              </a:spcBef>
+            </a:pPr>
+            <a:r>
+              <a:rPr sz="2000" b="1" i="0">
+                <a:solidFill>
+                  <a:srgbClr val="007433"/>
+                </a:solidFill>
+                <a:latin typeface="Calibri"/>
+              </a:rPr>
+              <a:t>14/10/2026</a:t>
+            </a:r>
+          </a:p>
+        </p:txBody>
+      </p:sp>
+      <p:sp>
+        <p:nvSpPr>
+          <p:cNvPr id="21" name="Rectangle 20"/>
+          <p:cNvSpPr/>
+          <p:nvPr/>
+        </p:nvSpPr>
+        <p:spPr>
+          <a:xfrm>
+            <a:off x="8368588" y="3794759"/>
+            <a:ext cx="2862986" cy="27432"/>
+          </a:xfrm>
+          <a:prstGeom prst="rect">
+            <a:avLst/>
+          </a:prstGeom>
+          <a:solidFill>
+            <a:srgbClr val="D0D0D0"/>
+          </a:solidFill>
+          <a:ln>
+            <a:noFill/>
+          </a:ln>
+          <a:effectLst/>
+        </p:spPr>
+        <p:style>
+          <a:lnRef idx="1">
+            <a:schemeClr val="accent1"/>
+          </a:lnRef>
+          <a:fillRef idx="3">
+            <a:schemeClr val="accent1"/>
+          </a:fillRef>
+          <a:effectRef idx="2">
+            <a:schemeClr val="accent1"/>
+          </a:effectRef>
+          <a:fontRef idx="minor">
+            <a:schemeClr val="lt1"/>
+          </a:fontRef>
+        </p:style>
+        <p:txBody>
+          <a:bodyPr rtlCol="0" anchor="ctr"/>
+          <a:lstStyle/>
+          <a:p>
+            <a:pPr algn="ctr"/>
+          </a:p>
+        </p:txBody>
+      </p:sp>
+      <p:sp>
+        <p:nvSpPr>
+          <p:cNvPr id="22" name="TextBox 21"/>
+          <p:cNvSpPr txBox="1"/>
+          <p:nvPr/>
+        </p:nvSpPr>
+        <p:spPr>
+          <a:xfrm>
+            <a:off x="8158276" y="3977639"/>
+            <a:ext cx="3283610" cy="822960"/>
+          </a:xfrm>
+          <a:prstGeom prst="rect">
+            <a:avLst/>
+          </a:prstGeom>
+          <a:noFill/>
+        </p:spPr>
+        <p:txBody>
+          <a:bodyPr wrap="square" anchor="t" lIns="0" rIns="0" tIns="0" bIns="0">
+            <a:spAutoFit/>
+          </a:bodyPr>
+          <a:lstStyle/>
+          <a:p>
+            <a:pPr algn="ctr"/>
+            <a:r>
+              <a:rPr sz="1100" b="1" i="0">
+                <a:solidFill>
+                  <a:srgbClr val="8F989D"/>
+                </a:solidFill>
+                <a:latin typeface="Calibri"/>
+              </a:rPr>
+              <a:t>CIERRE</a:t>
+            </a:r>
+          </a:p>
+          <a:p>
+            <a:pPr algn="ctr">
+              <a:spcBef>
+                <a:spcPts val="400"/>
+              </a:spcBef>
+            </a:pPr>
+            <a:r>
+              <a:rPr sz="2000" b="1" i="0">
+                <a:solidFill>
+                  <a:srgbClr val="0C2340"/>
+                </a:solidFill>
+                <a:latin typeface="Calibri"/>
+              </a:rPr>
+              <a:t>22/11/2026</a:t>
+            </a:r>
+          </a:p>
+        </p:txBody>
+      </p:sp>
+      <p:sp>
+        <p:nvSpPr>
+          <p:cNvPr id="23" name="Rounded Rectangle 22"/>
+          <p:cNvSpPr/>
+          <p:nvPr/>
+        </p:nvSpPr>
+        <p:spPr>
+          <a:xfrm>
+            <a:off x="640080" y="5056631"/>
+            <a:ext cx="10911535" cy="640080"/>
+          </a:xfrm>
+          <a:prstGeom prst="roundRect">
+            <a:avLst/>
+          </a:prstGeom>
+          <a:solidFill>
+            <a:srgbClr val="FDECD8"/>
+          </a:solidFill>
+          <a:ln>
+            <a:noFill/>
+          </a:ln>
+          <a:effectLst/>
+        </p:spPr>
+        <p:style>
+          <a:lnRef idx="1">
+            <a:schemeClr val="accent1"/>
+          </a:lnRef>
+          <a:fillRef idx="3">
+            <a:schemeClr val="accent1"/>
+          </a:fillRef>
+          <a:effectRef idx="2">
+            <a:schemeClr val="accent1"/>
+          </a:effectRef>
+          <a:fontRef idx="minor">
+            <a:schemeClr val="lt1"/>
+          </a:fontRef>
+        </p:style>
+        <p:txBody>
+          <a:bodyPr rtlCol="0" anchor="ctr"/>
+          <a:lstStyle/>
+          <a:p>
+            <a:pPr algn="ctr"/>
+          </a:p>
+        </p:txBody>
+      </p:sp>
+      <p:sp>
+        <p:nvSpPr>
+          <p:cNvPr id="24" name="TextBox 23"/>
+          <p:cNvSpPr txBox="1"/>
+          <p:nvPr/>
+        </p:nvSpPr>
+        <p:spPr>
+          <a:xfrm>
+            <a:off x="822959" y="5166359"/>
+            <a:ext cx="10545775" cy="457200"/>
+          </a:xfrm>
+          <a:prstGeom prst="rect">
+            <a:avLst/>
+          </a:prstGeom>
+          <a:noFill/>
+        </p:spPr>
+        <p:txBody>
+          <a:bodyPr wrap="square" anchor="ctr" lIns="0" rIns="0" tIns="0" bIns="0">
+            <a:spAutoFit/>
+          </a:bodyPr>
+          <a:lstStyle/>
+          <a:p>
             <a:r>
               <a:rPr sz="1200" b="0" i="0">
                 <a:solidFill>
@@ -6284,7 +7007,7 @@
                 </a:solidFill>
                 <a:latin typeface="Calibri"/>
               </a:rPr>
-              <a:t>EV05 50% + EXAM 50%. Enunciados: Recursos/ACAs/. </a:t>
+              <a:t>Corte 1 30% = Quiz 1 6% + Parcial 1 24% · Corte 2 30% = Quiz 2 9% + Parcial 2 21% · Corte 3 40% = ACA Final 32% + Quiz 3 4% + Autoevaluación 2% + Coevaluación 2% — libro de calificaciones de </a:t>
             </a:r>
             <a:r>
               <a:rPr sz="1200" b="1" i="0">
@@ -6293,7 +7016,7 @@
                 </a:solidFill>
                 <a:latin typeface="Calibri"/>
               </a:rPr>
-              <a:t>EXAM por grupo</a:t>
+              <a:t>CDigital</a:t>
             </a:r>
             <a:r>
               <a:rPr sz="1200" b="0" i="0">
@@ -6302,6 +7025,78 @@
                 </a:solidFill>
                 <a:latin typeface="Calibri"/>
               </a:rPr>
+              <a:t>. Quices y parciales: </a:t>
+            </a:r>
+            <a:r>
+              <a:rPr sz="1200" b="1" i="0">
+                <a:solidFill>
+                  <a:srgbClr val="2B2B2B"/>
+                </a:solidFill>
+                <a:latin typeface="Calibri"/>
+              </a:rPr>
+              <a:t>cuestionarios</a:t>
+            </a:r>
+            <a:r>
+              <a:rPr sz="1200" b="0" i="0">
+                <a:solidFill>
+                  <a:srgbClr val="2B2B2B"/>
+                </a:solidFill>
+                <a:latin typeface="Calibri"/>
+              </a:rPr>
+              <a:t> que cierran en día de clase (mar). </a:t>
+            </a:r>
+            <a:r>
+              <a:rPr sz="1200" b="1" i="0">
+                <a:solidFill>
+                  <a:srgbClr val="2B2B2B"/>
+                </a:solidFill>
+                <a:latin typeface="Calibri"/>
+              </a:rPr>
+              <a:t>ACA Final</a:t>
+            </a:r>
+            <a:r>
+              <a:rPr sz="1200" b="0" i="0">
+                <a:solidFill>
+                  <a:srgbClr val="2B2B2B"/>
+                </a:solidFill>
+                <a:latin typeface="Calibri"/>
+              </a:rPr>
+              <a:t> (tarea/documento) cierra </a:t>
+            </a:r>
+            <a:r>
+              <a:rPr sz="1200" b="1" i="0">
+                <a:solidFill>
+                  <a:srgbClr val="2B2B2B"/>
+                </a:solidFill>
+                <a:latin typeface="Calibri"/>
+              </a:rPr>
+              <a:t>14/11/2026</a:t>
+            </a:r>
+            <a:r>
+              <a:rPr sz="1200" b="0" i="0">
+                <a:solidFill>
+                  <a:srgbClr val="2B2B2B"/>
+                </a:solidFill>
+                <a:latin typeface="Calibri"/>
+              </a:rPr>
+              <a:t>. Enunciados: Clases/Recursos/ACAs/. </a:t>
+            </a:r>
+            <a:r>
+              <a:rPr sz="1200" b="1" i="0">
+                <a:solidFill>
+                  <a:srgbClr val="2B2B2B"/>
+                </a:solidFill>
+                <a:latin typeface="Calibri"/>
+              </a:rPr>
+              <a:t>ACA Final por grupo</a:t>
+            </a:r>
+            <a:r>
+              <a:rPr sz="1200" b="0" i="0">
+                <a:solidFill>
+                  <a:srgbClr val="2B2B2B"/>
+                </a:solidFill>
+                <a:latin typeface="Calibri"/>
+              </a:rPr>
               <a:t> — 54450: </a:t>
             </a:r>
             <a:r>
@@ -6311,7 +7106,7 @@
                 </a:solidFill>
                 <a:latin typeface="Calibri"/>
               </a:rPr>
-              <a:t>03/11/2026</a:t>
+              <a:t>07/11/2026</a:t>
             </a:r>
             <a:r>
               <a:rPr sz="1200" b="0" i="0">
@@ -6329,7 +7124,7 @@
                 </a:solidFill>
                 <a:latin typeface="Calibri"/>
               </a:rPr>
-              <a:t>10/11/2026</a:t>
+              <a:t>14/11/2026</a:t>
             </a:r>
             <a:r>
               <a:rPr sz="1200" b="0" i="0">
@@ -6338,7 +7133,7 @@
                 </a:solidFill>
                 <a:latin typeface="Calibri"/>
               </a:rPr>
-              <a:t>. (El cierre de notas del curso es posterior: 54450 </a:t>
+              <a:t>. (El cierre de notas es posterior: 54450 </a:t>
             </a:r>
             <a:r>
               <a:rPr sz="1200" b="1" i="0">
@@ -6381,7 +7176,7 @@
       </p:sp>
       <p:sp>
         <p:nvSpPr>
-          <p:cNvPr id="19" name="TextBox 18"/>
+          <p:cNvPr id="25" name="TextBox 24"/>
           <p:cNvSpPr txBox="1"/>
           <p:nvPr/>
         </p:nvSpPr>
@@ -6514,7 +7309,7 @@
                 </a:solidFill>
                 <a:latin typeface="Calibri"/>
               </a:rPr>
-              <a:t>ALCANCE DE LA EVALUACIÓN</a:t>
+              <a:t>CÓMO SE CALIFICA — LOS ÍTEMS DEL AULA (CDIGITAL)</a:t>
             </a:r>
           </a:p>
         </p:txBody>
@@ -6527,8 +7322,8 @@
         </p:nvSpPr>
         <p:spPr>
           <a:xfrm>
-            <a:off x="640080" y="1691639"/>
-            <a:ext cx="10911535" cy="4617720"/>
+            <a:off x="640080" y="1280160"/>
+            <a:ext cx="10911535" cy="411480"/>
           </a:xfrm>
           <a:prstGeom prst="rect">
             <a:avLst/>
@@ -6541,234 +7336,1122 @@
           </a:bodyPr>
           <a:lstStyle/>
           <a:p>
-            <a:pPr>
-              <a:spcAft>
-                <a:spcPts val="1000"/>
-              </a:spcAft>
-            </a:pPr>
-            <a:r>
-              <a:rPr sz="1300" b="0" i="0">
-                <a:solidFill>
-                  <a:srgbClr val="2B2B2B"/>
-                </a:solidFill>
-                <a:latin typeface="Calibri"/>
-              </a:rPr>
-              <a:t>–   </a:t>
-            </a:r>
-            <a:r>
-              <a:rPr sz="1300" b="1" i="0">
-                <a:solidFill>
-                  <a:srgbClr val="2B2B2B"/>
-                </a:solidFill>
-                <a:latin typeface="Calibri"/>
-              </a:rPr>
-              <a:t>Régimen:</a:t>
-            </a:r>
-            <a:r>
-              <a:rPr sz="1300" b="0" i="0">
-                <a:solidFill>
-                  <a:srgbClr val="2B2B2B"/>
-                </a:solidFill>
-                <a:latin typeface="Calibri"/>
-              </a:rPr>
-              <a:t> Art. 52 · </a:t>
-            </a:r>
-            <a:r>
-              <a:rPr sz="1300" b="1" i="0">
-                <a:solidFill>
-                  <a:srgbClr val="2B2B2B"/>
-                </a:solidFill>
-                <a:latin typeface="Calibri"/>
-              </a:rPr>
-              <a:t>corte único 100%</a:t>
-            </a:r>
-            <a:r>
-              <a:rPr sz="1300" b="0" i="0">
-                <a:solidFill>
-                  <a:srgbClr val="2B2B2B"/>
-                </a:solidFill>
-                <a:latin typeface="Calibri"/>
-              </a:rPr>
-              <a:t> = EV05 (proceso) </a:t>
-            </a:r>
-            <a:r>
-              <a:rPr sz="1300" b="1" i="0">
-                <a:solidFill>
-                  <a:srgbClr val="2B2B2B"/>
-                </a:solidFill>
-                <a:latin typeface="Calibri"/>
-              </a:rPr>
-              <a:t>50%</a:t>
-            </a:r>
-            <a:r>
-              <a:rPr sz="1300" b="0" i="0">
-                <a:solidFill>
-                  <a:srgbClr val="2B2B2B"/>
-                </a:solidFill>
-                <a:latin typeface="Calibri"/>
-              </a:rPr>
-              <a:t> + EXAM (sustentación) </a:t>
-            </a:r>
-            <a:r>
-              <a:rPr sz="1300" b="1" i="0">
-                <a:solidFill>
-                  <a:srgbClr val="2B2B2B"/>
-                </a:solidFill>
-                <a:latin typeface="Calibri"/>
-              </a:rPr>
-              <a:t>50%</a:t>
-            </a:r>
-            <a:r>
-              <a:rPr sz="1300" b="0" i="0">
-                <a:solidFill>
-                  <a:srgbClr val="2B2B2B"/>
-                </a:solidFill>
-                <a:latin typeface="Calibri"/>
-              </a:rPr>
-              <a:t> (syllabus SIAC TG3).</a:t>
-            </a:r>
-          </a:p>
-          <a:p>
-            <a:pPr>
-              <a:spcAft>
-                <a:spcPts val="1000"/>
-              </a:spcAft>
-            </a:pPr>
-            <a:r>
-              <a:rPr sz="1300" b="0" i="0">
-                <a:solidFill>
-                  <a:srgbClr val="2B2B2B"/>
-                </a:solidFill>
-                <a:latin typeface="Calibri"/>
-              </a:rPr>
-              <a:t>–   Autoevaluación y coevaluación </a:t>
-            </a:r>
-            <a:r>
-              <a:rPr sz="1300" b="1" i="0">
-                <a:solidFill>
-                  <a:srgbClr val="2B2B2B"/>
-                </a:solidFill>
-                <a:latin typeface="Calibri"/>
-              </a:rPr>
-              <a:t>con porcentaje propio</a:t>
-            </a:r>
-            <a:r>
-              <a:rPr sz="1300" b="0" i="0">
-                <a:solidFill>
-                  <a:srgbClr val="2B2B2B"/>
-                </a:solidFill>
-                <a:latin typeface="Calibri"/>
-              </a:rPr>
-              <a:t> (modelo AFI Proyecto I: 4% + 4% según ESP329): </a:t>
-            </a:r>
-            <a:r>
-              <a:rPr sz="1300" b="1" i="0">
-                <a:solidFill>
-                  <a:srgbClr val="2B2B2B"/>
-                </a:solidFill>
-                <a:latin typeface="Calibri"/>
-              </a:rPr>
-              <a:t>no aplican</a:t>
-            </a:r>
-            <a:r>
-              <a:rPr sz="1300" b="0" i="0">
-                <a:solidFill>
-                  <a:srgbClr val="2B2B2B"/>
-                </a:solidFill>
-                <a:latin typeface="Calibri"/>
-              </a:rPr>
-              <a:t> en esta asignatura según el syllabus SIAC / Art. 52.</a:t>
-            </a:r>
-          </a:p>
-          <a:p>
-            <a:pPr>
-              <a:spcAft>
-                <a:spcPts val="1000"/>
-              </a:spcAft>
-            </a:pPr>
-            <a:r>
-              <a:rPr sz="1300" b="0" i="0">
-                <a:solidFill>
-                  <a:srgbClr val="2B2B2B"/>
-                </a:solidFill>
-                <a:latin typeface="Calibri"/>
-              </a:rPr>
-              <a:t>–   No confundir con la autoevaluación </a:t>
-            </a:r>
-            <a:r>
-              <a:rPr sz="1300" b="1" i="0">
-                <a:solidFill>
-                  <a:srgbClr val="2B2B2B"/>
-                </a:solidFill>
-                <a:latin typeface="Calibri"/>
-              </a:rPr>
-              <a:t>institucional</a:t>
-            </a:r>
-            <a:r>
-              <a:rPr sz="1300" b="0" i="0">
-                <a:solidFill>
-                  <a:srgbClr val="2B2B2B"/>
-                </a:solidFill>
-                <a:latin typeface="Calibri"/>
-              </a:rPr>
-              <a:t> SIAC (calidad de programas en acreditacion.cun.edu.co): esa no es una nota del curso.</a:t>
-            </a:r>
-          </a:p>
-          <a:p>
-            <a:pPr>
-              <a:spcAft>
-                <a:spcPts val="1000"/>
-              </a:spcAft>
-            </a:pPr>
-            <a:r>
-              <a:rPr sz="1300" b="0" i="0">
-                <a:solidFill>
-                  <a:srgbClr val="2B2B2B"/>
-                </a:solidFill>
-                <a:latin typeface="Calibri"/>
-              </a:rPr>
-              <a:t>–   Entregas, rúbricas EV y publicación de notas: solo por </a:t>
-            </a:r>
-            <a:r>
-              <a:rPr sz="1300" b="1" i="0">
-                <a:solidFill>
-                  <a:srgbClr val="2B2B2B"/>
-                </a:solidFill>
-                <a:latin typeface="Calibri"/>
-              </a:rPr>
-              <a:t>CDigital</a:t>
-            </a:r>
-            <a:r>
-              <a:rPr sz="1300" b="0" i="0">
-                <a:solidFill>
-                  <a:srgbClr val="2B2B2B"/>
-                </a:solidFill>
-                <a:latin typeface="Calibri"/>
-              </a:rPr>
-              <a:t>.</a:t>
-            </a:r>
-          </a:p>
-          <a:p>
-            <a:pPr>
-              <a:spcAft>
-                <a:spcPts val="1000"/>
-              </a:spcAft>
-            </a:pPr>
-            <a:r>
-              <a:rPr sz="1300" b="0" i="0">
-                <a:solidFill>
-                  <a:srgbClr val="2B2B2B"/>
-                </a:solidFill>
-                <a:latin typeface="Calibri"/>
-              </a:rPr>
-              <a:t>–   Si Coordinación publica un instrumento formativo sin peso propio, se anuncia en el aula; no inventamos % fuera del syllabus.</a:t>
-            </a:r>
-          </a:p>
-        </p:txBody>
-      </p:sp>
-      <p:sp>
-        <p:nvSpPr>
-          <p:cNvPr id="5" name="TextBox 4"/>
+            <a:pPr algn="ctr"/>
+            <a:r>
+              <a:rPr sz="1500" b="1" i="0">
+                <a:solidFill>
+                  <a:srgbClr val="2B2B2B"/>
+                </a:solidFill>
+                <a:latin typeface="Calibri"/>
+              </a:rPr>
+              <a:t>Libro de calificaciones del aula</a:t>
+            </a:r>
+            <a:r>
+              <a:rPr sz="1500" b="0" i="0">
+                <a:solidFill>
+                  <a:srgbClr val="2B2B2B"/>
+                </a:solidFill>
+                <a:latin typeface="Calibri"/>
+              </a:rPr>
+              <a:t> (CDigital) · cortes 30% / 30% / 40% · los pesos suman </a:t>
+            </a:r>
+            <a:r>
+              <a:rPr sz="1500" b="1" i="0">
+                <a:solidFill>
+                  <a:srgbClr val="2B2B2B"/>
+                </a:solidFill>
+                <a:latin typeface="Calibri"/>
+              </a:rPr>
+              <a:t>100%</a:t>
+            </a:r>
+          </a:p>
+        </p:txBody>
+      </p:sp>
+      <p:graphicFrame>
+        <p:nvGraphicFramePr>
+          <p:cNvPr id="5" name="Table 4"/>
+          <p:cNvGraphicFramePr>
+            <a:graphicFrameLocks noGrp="1"/>
+          </p:cNvGraphicFramePr>
+          <p:nvPr/>
+        </p:nvGraphicFramePr>
+        <p:xfrm>
+          <a:off x="640080" y="2011679"/>
+          <a:ext cx="10911531" cy="4297680"/>
+        </p:xfrm>
+        <a:graphic>
+          <a:graphicData uri="http://schemas.openxmlformats.org/drawingml/2006/table">
+            <a:tbl>
+              <a:tblPr>
+                <a:tableStyleId>{2D5ABB26-0587-4C30-8999-92F81FD0307C}</a:tableStyleId>
+              </a:tblPr>
+              <a:tblGrid>
+                <a:gridCol w="2220931"/>
+                <a:gridCol w="1448433"/>
+                <a:gridCol w="1448433"/>
+                <a:gridCol w="1351871"/>
+                <a:gridCol w="4441863"/>
+              </a:tblGrid>
+              <a:tr h="477520">
+                <a:tc>
+                  <a:txBody>
+                    <a:bodyPr/>
+                    <a:lstStyle/>
+                    <a:p>
+                      <a:pPr algn="l"/>
+                      <a:r>
+                        <a:rPr sz="1300" b="1" i="0">
+                          <a:solidFill>
+                            <a:srgbClr val="FFFFFF"/>
+                          </a:solidFill>
+                          <a:latin typeface="Calibri"/>
+                        </a:rPr>
+                        <a:t>Ítem en CDigital</a:t>
+                      </a:r>
+                    </a:p>
+                  </a:txBody>
+                  <a:tcPr anchor="ctr" marL="109728" marR="91440" marT="36576" marB="36576">
+                    <a:solidFill>
+                      <a:srgbClr val="0C2340"/>
+                    </a:solidFill>
+                  </a:tcPr>
+                </a:tc>
+                <a:tc>
+                  <a:txBody>
+                    <a:bodyPr/>
+                    <a:lstStyle/>
+                    <a:p>
+                      <a:pPr algn="l"/>
+                      <a:r>
+                        <a:rPr sz="1300" b="1" i="0">
+                          <a:solidFill>
+                            <a:srgbClr val="FFFFFF"/>
+                          </a:solidFill>
+                          <a:latin typeface="Calibri"/>
+                        </a:rPr>
+                        <a:t>Tipo</a:t>
+                      </a:r>
+                    </a:p>
+                  </a:txBody>
+                  <a:tcPr anchor="ctr" marL="109728" marR="91440" marT="36576" marB="36576">
+                    <a:solidFill>
+                      <a:srgbClr val="0C2340"/>
+                    </a:solidFill>
+                  </a:tcPr>
+                </a:tc>
+                <a:tc>
+                  <a:txBody>
+                    <a:bodyPr/>
+                    <a:lstStyle/>
+                    <a:p>
+                      <a:pPr algn="l"/>
+                      <a:r>
+                        <a:rPr sz="1300" b="1" i="0">
+                          <a:solidFill>
+                            <a:srgbClr val="FFFFFF"/>
+                          </a:solidFill>
+                          <a:latin typeface="Calibri"/>
+                        </a:rPr>
+                        <a:t>Corte (peso)</a:t>
+                      </a:r>
+                    </a:p>
+                  </a:txBody>
+                  <a:tcPr anchor="ctr" marL="109728" marR="91440" marT="36576" marB="36576">
+                    <a:solidFill>
+                      <a:srgbClr val="0C2340"/>
+                    </a:solidFill>
+                  </a:tcPr>
+                </a:tc>
+                <a:tc>
+                  <a:txBody>
+                    <a:bodyPr/>
+                    <a:lstStyle/>
+                    <a:p>
+                      <a:pPr algn="l"/>
+                      <a:r>
+                        <a:rPr sz="1300" b="1" i="0">
+                          <a:solidFill>
+                            <a:srgbClr val="FFFFFF"/>
+                          </a:solidFill>
+                          <a:latin typeface="Calibri"/>
+                        </a:rPr>
+                        <a:t>Peso del ítem</a:t>
+                      </a:r>
+                    </a:p>
+                  </a:txBody>
+                  <a:tcPr anchor="ctr" marL="109728" marR="91440" marT="36576" marB="36576">
+                    <a:solidFill>
+                      <a:srgbClr val="0C2340"/>
+                    </a:solidFill>
+                  </a:tcPr>
+                </a:tc>
+                <a:tc>
+                  <a:txBody>
+                    <a:bodyPr/>
+                    <a:lstStyle/>
+                    <a:p>
+                      <a:pPr algn="l"/>
+                      <a:r>
+                        <a:rPr sz="1300" b="1" i="0">
+                          <a:solidFill>
+                            <a:srgbClr val="FFFFFF"/>
+                          </a:solidFill>
+                          <a:latin typeface="Calibri"/>
+                        </a:rPr>
+                        <a:t>Cierre</a:t>
+                      </a:r>
+                    </a:p>
+                  </a:txBody>
+                  <a:tcPr anchor="ctr" marL="109728" marR="91440" marT="36576" marB="36576">
+                    <a:solidFill>
+                      <a:srgbClr val="0C2340"/>
+                    </a:solidFill>
+                  </a:tcPr>
+                </a:tc>
+              </a:tr>
+              <a:tr h="477520">
+                <a:tc>
+                  <a:txBody>
+                    <a:bodyPr/>
+                    <a:lstStyle/>
+                    <a:p>
+                      <a:pPr algn="l"/>
+                      <a:r>
+                        <a:rPr sz="1100" b="1" i="0">
+                          <a:solidFill>
+                            <a:srgbClr val="2B2B2B"/>
+                          </a:solidFill>
+                          <a:latin typeface="Calibri"/>
+                        </a:rPr>
+                        <a:t>Quiz 1</a:t>
+                      </a:r>
+                    </a:p>
+                  </a:txBody>
+                  <a:tcPr anchor="ctr" marL="109728" marR="91440" marT="36576" marB="36576">
+                    <a:solidFill>
+                      <a:srgbClr val="FFFFFF"/>
+                    </a:solidFill>
+                  </a:tcPr>
+                </a:tc>
+                <a:tc>
+                  <a:txBody>
+                    <a:bodyPr/>
+                    <a:lstStyle/>
+                    <a:p>
+                      <a:pPr algn="l"/>
+                      <a:r>
+                        <a:rPr sz="1100" b="0" i="0">
+                          <a:solidFill>
+                            <a:srgbClr val="2B2B2B"/>
+                          </a:solidFill>
+                          <a:latin typeface="Calibri"/>
+                        </a:rPr>
+                        <a:t>Cuestionario</a:t>
+                      </a:r>
+                    </a:p>
+                  </a:txBody>
+                  <a:tcPr anchor="ctr" marL="109728" marR="91440" marT="36576" marB="36576">
+                    <a:solidFill>
+                      <a:srgbClr val="FFFFFF"/>
+                    </a:solidFill>
+                  </a:tcPr>
+                </a:tc>
+                <a:tc>
+                  <a:txBody>
+                    <a:bodyPr/>
+                    <a:lstStyle/>
+                    <a:p>
+                      <a:pPr algn="l"/>
+                      <a:r>
+                        <a:rPr sz="1100" b="0" i="0">
+                          <a:solidFill>
+                            <a:srgbClr val="2B2B2B"/>
+                          </a:solidFill>
+                          <a:latin typeface="Calibri"/>
+                        </a:rPr>
+                        <a:t>1 (30%)</a:t>
+                      </a:r>
+                    </a:p>
+                  </a:txBody>
+                  <a:tcPr anchor="ctr" marL="109728" marR="91440" marT="36576" marB="36576">
+                    <a:solidFill>
+                      <a:srgbClr val="FFFFFF"/>
+                    </a:solidFill>
+                  </a:tcPr>
+                </a:tc>
+                <a:tc>
+                  <a:txBody>
+                    <a:bodyPr/>
+                    <a:lstStyle/>
+                    <a:p>
+                      <a:pPr algn="l"/>
+                      <a:r>
+                        <a:rPr sz="1100" b="1" i="0">
+                          <a:solidFill>
+                            <a:srgbClr val="2B2B2B"/>
+                          </a:solidFill>
+                          <a:latin typeface="Calibri"/>
+                        </a:rPr>
+                        <a:t>6%</a:t>
+                      </a:r>
+                    </a:p>
+                  </a:txBody>
+                  <a:tcPr anchor="ctr" marL="109728" marR="91440" marT="36576" marB="36576">
+                    <a:solidFill>
+                      <a:srgbClr val="FFFFFF"/>
+                    </a:solidFill>
+                  </a:tcPr>
+                </a:tc>
+                <a:tc>
+                  <a:txBody>
+                    <a:bodyPr/>
+                    <a:lstStyle/>
+                    <a:p>
+                      <a:pPr algn="l"/>
+                      <a:r>
+                        <a:rPr sz="1100" b="0" i="0">
+                          <a:solidFill>
+                            <a:srgbClr val="2B2B2B"/>
+                          </a:solidFill>
+                          <a:latin typeface="Calibri"/>
+                        </a:rPr>
+                        <a:t>25/08/2026</a:t>
+                      </a:r>
+                    </a:p>
+                  </a:txBody>
+                  <a:tcPr anchor="ctr" marL="109728" marR="91440" marT="36576" marB="36576">
+                    <a:solidFill>
+                      <a:srgbClr val="FFFFFF"/>
+                    </a:solidFill>
+                  </a:tcPr>
+                </a:tc>
+              </a:tr>
+              <a:tr h="477520">
+                <a:tc>
+                  <a:txBody>
+                    <a:bodyPr/>
+                    <a:lstStyle/>
+                    <a:p>
+                      <a:pPr algn="l"/>
+                      <a:r>
+                        <a:rPr sz="1100" b="1" i="0">
+                          <a:solidFill>
+                            <a:srgbClr val="2B2B2B"/>
+                          </a:solidFill>
+                          <a:latin typeface="Calibri"/>
+                        </a:rPr>
+                        <a:t>Parcial 1</a:t>
+                      </a:r>
+                    </a:p>
+                  </a:txBody>
+                  <a:tcPr anchor="ctr" marL="109728" marR="91440" marT="36576" marB="36576">
+                    <a:solidFill>
+                      <a:srgbClr val="F2F2F2"/>
+                    </a:solidFill>
+                  </a:tcPr>
+                </a:tc>
+                <a:tc>
+                  <a:txBody>
+                    <a:bodyPr/>
+                    <a:lstStyle/>
+                    <a:p>
+                      <a:pPr algn="l"/>
+                      <a:r>
+                        <a:rPr sz="1100" b="0" i="0">
+                          <a:solidFill>
+                            <a:srgbClr val="2B2B2B"/>
+                          </a:solidFill>
+                          <a:latin typeface="Calibri"/>
+                        </a:rPr>
+                        <a:t>Cuestionario</a:t>
+                      </a:r>
+                    </a:p>
+                  </a:txBody>
+                  <a:tcPr anchor="ctr" marL="109728" marR="91440" marT="36576" marB="36576">
+                    <a:solidFill>
+                      <a:srgbClr val="F2F2F2"/>
+                    </a:solidFill>
+                  </a:tcPr>
+                </a:tc>
+                <a:tc>
+                  <a:txBody>
+                    <a:bodyPr/>
+                    <a:lstStyle/>
+                    <a:p>
+                      <a:pPr algn="l"/>
+                      <a:r>
+                        <a:rPr sz="1100" b="0" i="0">
+                          <a:solidFill>
+                            <a:srgbClr val="2B2B2B"/>
+                          </a:solidFill>
+                          <a:latin typeface="Calibri"/>
+                        </a:rPr>
+                        <a:t>1 (30%)</a:t>
+                      </a:r>
+                    </a:p>
+                  </a:txBody>
+                  <a:tcPr anchor="ctr" marL="109728" marR="91440" marT="36576" marB="36576">
+                    <a:solidFill>
+                      <a:srgbClr val="F2F2F2"/>
+                    </a:solidFill>
+                  </a:tcPr>
+                </a:tc>
+                <a:tc>
+                  <a:txBody>
+                    <a:bodyPr/>
+                    <a:lstStyle/>
+                    <a:p>
+                      <a:pPr algn="l"/>
+                      <a:r>
+                        <a:rPr sz="1100" b="1" i="0">
+                          <a:solidFill>
+                            <a:srgbClr val="2B2B2B"/>
+                          </a:solidFill>
+                          <a:latin typeface="Calibri"/>
+                        </a:rPr>
+                        <a:t>24%</a:t>
+                      </a:r>
+                    </a:p>
+                  </a:txBody>
+                  <a:tcPr anchor="ctr" marL="109728" marR="91440" marT="36576" marB="36576">
+                    <a:solidFill>
+                      <a:srgbClr val="F2F2F2"/>
+                    </a:solidFill>
+                  </a:tcPr>
+                </a:tc>
+                <a:tc>
+                  <a:txBody>
+                    <a:bodyPr/>
+                    <a:lstStyle/>
+                    <a:p>
+                      <a:pPr algn="l"/>
+                      <a:r>
+                        <a:rPr sz="1100" b="0" i="0">
+                          <a:solidFill>
+                            <a:srgbClr val="2B2B2B"/>
+                          </a:solidFill>
+                          <a:latin typeface="Calibri"/>
+                        </a:rPr>
+                        <a:t>15/09/2026</a:t>
+                      </a:r>
+                    </a:p>
+                  </a:txBody>
+                  <a:tcPr anchor="ctr" marL="109728" marR="91440" marT="36576" marB="36576">
+                    <a:solidFill>
+                      <a:srgbClr val="F2F2F2"/>
+                    </a:solidFill>
+                  </a:tcPr>
+                </a:tc>
+              </a:tr>
+              <a:tr h="477520">
+                <a:tc>
+                  <a:txBody>
+                    <a:bodyPr/>
+                    <a:lstStyle/>
+                    <a:p>
+                      <a:pPr algn="l"/>
+                      <a:r>
+                        <a:rPr sz="1100" b="1" i="0">
+                          <a:solidFill>
+                            <a:srgbClr val="2B2B2B"/>
+                          </a:solidFill>
+                          <a:latin typeface="Calibri"/>
+                        </a:rPr>
+                        <a:t>Quiz 2</a:t>
+                      </a:r>
+                    </a:p>
+                  </a:txBody>
+                  <a:tcPr anchor="ctr" marL="109728" marR="91440" marT="36576" marB="36576">
+                    <a:solidFill>
+                      <a:srgbClr val="FFFFFF"/>
+                    </a:solidFill>
+                  </a:tcPr>
+                </a:tc>
+                <a:tc>
+                  <a:txBody>
+                    <a:bodyPr/>
+                    <a:lstStyle/>
+                    <a:p>
+                      <a:pPr algn="l"/>
+                      <a:r>
+                        <a:rPr sz="1100" b="0" i="0">
+                          <a:solidFill>
+                            <a:srgbClr val="2B2B2B"/>
+                          </a:solidFill>
+                          <a:latin typeface="Calibri"/>
+                        </a:rPr>
+                        <a:t>Cuestionario</a:t>
+                      </a:r>
+                    </a:p>
+                  </a:txBody>
+                  <a:tcPr anchor="ctr" marL="109728" marR="91440" marT="36576" marB="36576">
+                    <a:solidFill>
+                      <a:srgbClr val="FFFFFF"/>
+                    </a:solidFill>
+                  </a:tcPr>
+                </a:tc>
+                <a:tc>
+                  <a:txBody>
+                    <a:bodyPr/>
+                    <a:lstStyle/>
+                    <a:p>
+                      <a:pPr algn="l"/>
+                      <a:r>
+                        <a:rPr sz="1100" b="0" i="0">
+                          <a:solidFill>
+                            <a:srgbClr val="2B2B2B"/>
+                          </a:solidFill>
+                          <a:latin typeface="Calibri"/>
+                        </a:rPr>
+                        <a:t>2 (30%)</a:t>
+                      </a:r>
+                    </a:p>
+                  </a:txBody>
+                  <a:tcPr anchor="ctr" marL="109728" marR="91440" marT="36576" marB="36576">
+                    <a:solidFill>
+                      <a:srgbClr val="FFFFFF"/>
+                    </a:solidFill>
+                  </a:tcPr>
+                </a:tc>
+                <a:tc>
+                  <a:txBody>
+                    <a:bodyPr/>
+                    <a:lstStyle/>
+                    <a:p>
+                      <a:pPr algn="l"/>
+                      <a:r>
+                        <a:rPr sz="1100" b="1" i="0">
+                          <a:solidFill>
+                            <a:srgbClr val="2B2B2B"/>
+                          </a:solidFill>
+                          <a:latin typeface="Calibri"/>
+                        </a:rPr>
+                        <a:t>9%</a:t>
+                      </a:r>
+                    </a:p>
+                  </a:txBody>
+                  <a:tcPr anchor="ctr" marL="109728" marR="91440" marT="36576" marB="36576">
+                    <a:solidFill>
+                      <a:srgbClr val="FFFFFF"/>
+                    </a:solidFill>
+                  </a:tcPr>
+                </a:tc>
+                <a:tc>
+                  <a:txBody>
+                    <a:bodyPr/>
+                    <a:lstStyle/>
+                    <a:p>
+                      <a:pPr algn="l"/>
+                      <a:r>
+                        <a:rPr sz="1100" b="0" i="0">
+                          <a:solidFill>
+                            <a:srgbClr val="2B2B2B"/>
+                          </a:solidFill>
+                          <a:latin typeface="Calibri"/>
+                        </a:rPr>
+                        <a:t>29/09/2026</a:t>
+                      </a:r>
+                    </a:p>
+                  </a:txBody>
+                  <a:tcPr anchor="ctr" marL="109728" marR="91440" marT="36576" marB="36576">
+                    <a:solidFill>
+                      <a:srgbClr val="FFFFFF"/>
+                    </a:solidFill>
+                  </a:tcPr>
+                </a:tc>
+              </a:tr>
+              <a:tr h="477520">
+                <a:tc>
+                  <a:txBody>
+                    <a:bodyPr/>
+                    <a:lstStyle/>
+                    <a:p>
+                      <a:pPr algn="l"/>
+                      <a:r>
+                        <a:rPr sz="1100" b="1" i="0">
+                          <a:solidFill>
+                            <a:srgbClr val="2B2B2B"/>
+                          </a:solidFill>
+                          <a:latin typeface="Calibri"/>
+                        </a:rPr>
+                        <a:t>Parcial 2</a:t>
+                      </a:r>
+                    </a:p>
+                  </a:txBody>
+                  <a:tcPr anchor="ctr" marL="109728" marR="91440" marT="36576" marB="36576">
+                    <a:solidFill>
+                      <a:srgbClr val="F2F2F2"/>
+                    </a:solidFill>
+                  </a:tcPr>
+                </a:tc>
+                <a:tc>
+                  <a:txBody>
+                    <a:bodyPr/>
+                    <a:lstStyle/>
+                    <a:p>
+                      <a:pPr algn="l"/>
+                      <a:r>
+                        <a:rPr sz="1100" b="0" i="0">
+                          <a:solidFill>
+                            <a:srgbClr val="2B2B2B"/>
+                          </a:solidFill>
+                          <a:latin typeface="Calibri"/>
+                        </a:rPr>
+                        <a:t>Cuestionario</a:t>
+                      </a:r>
+                    </a:p>
+                  </a:txBody>
+                  <a:tcPr anchor="ctr" marL="109728" marR="91440" marT="36576" marB="36576">
+                    <a:solidFill>
+                      <a:srgbClr val="F2F2F2"/>
+                    </a:solidFill>
+                  </a:tcPr>
+                </a:tc>
+                <a:tc>
+                  <a:txBody>
+                    <a:bodyPr/>
+                    <a:lstStyle/>
+                    <a:p>
+                      <a:pPr algn="l"/>
+                      <a:r>
+                        <a:rPr sz="1100" b="0" i="0">
+                          <a:solidFill>
+                            <a:srgbClr val="2B2B2B"/>
+                          </a:solidFill>
+                          <a:latin typeface="Calibri"/>
+                        </a:rPr>
+                        <a:t>2 (30%)</a:t>
+                      </a:r>
+                    </a:p>
+                  </a:txBody>
+                  <a:tcPr anchor="ctr" marL="109728" marR="91440" marT="36576" marB="36576">
+                    <a:solidFill>
+                      <a:srgbClr val="F2F2F2"/>
+                    </a:solidFill>
+                  </a:tcPr>
+                </a:tc>
+                <a:tc>
+                  <a:txBody>
+                    <a:bodyPr/>
+                    <a:lstStyle/>
+                    <a:p>
+                      <a:pPr algn="l"/>
+                      <a:r>
+                        <a:rPr sz="1100" b="1" i="0">
+                          <a:solidFill>
+                            <a:srgbClr val="2B2B2B"/>
+                          </a:solidFill>
+                          <a:latin typeface="Calibri"/>
+                        </a:rPr>
+                        <a:t>21%</a:t>
+                      </a:r>
+                    </a:p>
+                  </a:txBody>
+                  <a:tcPr anchor="ctr" marL="109728" marR="91440" marT="36576" marB="36576">
+                    <a:solidFill>
+                      <a:srgbClr val="F2F2F2"/>
+                    </a:solidFill>
+                  </a:tcPr>
+                </a:tc>
+                <a:tc>
+                  <a:txBody>
+                    <a:bodyPr/>
+                    <a:lstStyle/>
+                    <a:p>
+                      <a:pPr algn="l"/>
+                      <a:r>
+                        <a:rPr sz="1100" b="0" i="0">
+                          <a:solidFill>
+                            <a:srgbClr val="2B2B2B"/>
+                          </a:solidFill>
+                          <a:latin typeface="Calibri"/>
+                        </a:rPr>
+                        <a:t>13/10/2026</a:t>
+                      </a:r>
+                    </a:p>
+                  </a:txBody>
+                  <a:tcPr anchor="ctr" marL="109728" marR="91440" marT="36576" marB="36576">
+                    <a:solidFill>
+                      <a:srgbClr val="F2F2F2"/>
+                    </a:solidFill>
+                  </a:tcPr>
+                </a:tc>
+              </a:tr>
+              <a:tr h="477520">
+                <a:tc>
+                  <a:txBody>
+                    <a:bodyPr/>
+                    <a:lstStyle/>
+                    <a:p>
+                      <a:pPr algn="l"/>
+                      <a:r>
+                        <a:rPr sz="1100" b="1" i="0">
+                          <a:solidFill>
+                            <a:srgbClr val="2B2B2B"/>
+                          </a:solidFill>
+                          <a:latin typeface="Calibri"/>
+                        </a:rPr>
+                        <a:t>ACA Final</a:t>
+                      </a:r>
+                    </a:p>
+                  </a:txBody>
+                  <a:tcPr anchor="ctr" marL="109728" marR="91440" marT="36576" marB="36576">
+                    <a:solidFill>
+                      <a:srgbClr val="FFFFFF"/>
+                    </a:solidFill>
+                  </a:tcPr>
+                </a:tc>
+                <a:tc>
+                  <a:txBody>
+                    <a:bodyPr/>
+                    <a:lstStyle/>
+                    <a:p>
+                      <a:pPr algn="l"/>
+                      <a:r>
+                        <a:rPr sz="1100" b="0" i="0">
+                          <a:solidFill>
+                            <a:srgbClr val="2B2B2B"/>
+                          </a:solidFill>
+                          <a:latin typeface="Calibri"/>
+                        </a:rPr>
+                        <a:t>Tarea</a:t>
+                      </a:r>
+                    </a:p>
+                  </a:txBody>
+                  <a:tcPr anchor="ctr" marL="109728" marR="91440" marT="36576" marB="36576">
+                    <a:solidFill>
+                      <a:srgbClr val="FFFFFF"/>
+                    </a:solidFill>
+                  </a:tcPr>
+                </a:tc>
+                <a:tc>
+                  <a:txBody>
+                    <a:bodyPr/>
+                    <a:lstStyle/>
+                    <a:p>
+                      <a:pPr algn="l"/>
+                      <a:r>
+                        <a:rPr sz="1100" b="0" i="0">
+                          <a:solidFill>
+                            <a:srgbClr val="2B2B2B"/>
+                          </a:solidFill>
+                          <a:latin typeface="Calibri"/>
+                        </a:rPr>
+                        <a:t>3 (40%)</a:t>
+                      </a:r>
+                    </a:p>
+                  </a:txBody>
+                  <a:tcPr anchor="ctr" marL="109728" marR="91440" marT="36576" marB="36576">
+                    <a:solidFill>
+                      <a:srgbClr val="FFFFFF"/>
+                    </a:solidFill>
+                  </a:tcPr>
+                </a:tc>
+                <a:tc>
+                  <a:txBody>
+                    <a:bodyPr/>
+                    <a:lstStyle/>
+                    <a:p>
+                      <a:pPr algn="l"/>
+                      <a:r>
+                        <a:rPr sz="1100" b="1" i="0">
+                          <a:solidFill>
+                            <a:srgbClr val="2B2B2B"/>
+                          </a:solidFill>
+                          <a:latin typeface="Calibri"/>
+                        </a:rPr>
+                        <a:t>32%</a:t>
+                      </a:r>
+                    </a:p>
+                  </a:txBody>
+                  <a:tcPr anchor="ctr" marL="109728" marR="91440" marT="36576" marB="36576">
+                    <a:solidFill>
+                      <a:srgbClr val="FFFFFF"/>
+                    </a:solidFill>
+                  </a:tcPr>
+                </a:tc>
+                <a:tc>
+                  <a:txBody>
+                    <a:bodyPr/>
+                    <a:lstStyle/>
+                    <a:p>
+                      <a:pPr algn="l"/>
+                      <a:r>
+                        <a:rPr sz="1100" b="0" i="0">
+                          <a:solidFill>
+                            <a:srgbClr val="2B2B2B"/>
+                          </a:solidFill>
+                          <a:latin typeface="Calibri"/>
+                        </a:rPr>
+                        <a:t>07/11/2026 (54450) · 14/11/2026 (54466/54467)</a:t>
+                      </a:r>
+                    </a:p>
+                  </a:txBody>
+                  <a:tcPr anchor="ctr" marL="109728" marR="91440" marT="36576" marB="36576">
+                    <a:solidFill>
+                      <a:srgbClr val="FFFFFF"/>
+                    </a:solidFill>
+                  </a:tcPr>
+                </a:tc>
+              </a:tr>
+              <a:tr h="477520">
+                <a:tc>
+                  <a:txBody>
+                    <a:bodyPr/>
+                    <a:lstStyle/>
+                    <a:p>
+                      <a:pPr algn="l"/>
+                      <a:r>
+                        <a:rPr sz="1100" b="1" i="0">
+                          <a:solidFill>
+                            <a:srgbClr val="2B2B2B"/>
+                          </a:solidFill>
+                          <a:latin typeface="Calibri"/>
+                        </a:rPr>
+                        <a:t>Quiz 3</a:t>
+                      </a:r>
+                    </a:p>
+                  </a:txBody>
+                  <a:tcPr anchor="ctr" marL="109728" marR="91440" marT="36576" marB="36576">
+                    <a:solidFill>
+                      <a:srgbClr val="F2F2F2"/>
+                    </a:solidFill>
+                  </a:tcPr>
+                </a:tc>
+                <a:tc>
+                  <a:txBody>
+                    <a:bodyPr/>
+                    <a:lstStyle/>
+                    <a:p>
+                      <a:pPr algn="l"/>
+                      <a:r>
+                        <a:rPr sz="1100" b="0" i="0">
+                          <a:solidFill>
+                            <a:srgbClr val="2B2B2B"/>
+                          </a:solidFill>
+                          <a:latin typeface="Calibri"/>
+                        </a:rPr>
+                        <a:t>Cuestionario</a:t>
+                      </a:r>
+                    </a:p>
+                  </a:txBody>
+                  <a:tcPr anchor="ctr" marL="109728" marR="91440" marT="36576" marB="36576">
+                    <a:solidFill>
+                      <a:srgbClr val="F2F2F2"/>
+                    </a:solidFill>
+                  </a:tcPr>
+                </a:tc>
+                <a:tc>
+                  <a:txBody>
+                    <a:bodyPr/>
+                    <a:lstStyle/>
+                    <a:p>
+                      <a:pPr algn="l"/>
+                      <a:r>
+                        <a:rPr sz="1100" b="0" i="0">
+                          <a:solidFill>
+                            <a:srgbClr val="2B2B2B"/>
+                          </a:solidFill>
+                          <a:latin typeface="Calibri"/>
+                        </a:rPr>
+                        <a:t>3 (40%)</a:t>
+                      </a:r>
+                    </a:p>
+                  </a:txBody>
+                  <a:tcPr anchor="ctr" marL="109728" marR="91440" marT="36576" marB="36576">
+                    <a:solidFill>
+                      <a:srgbClr val="F2F2F2"/>
+                    </a:solidFill>
+                  </a:tcPr>
+                </a:tc>
+                <a:tc>
+                  <a:txBody>
+                    <a:bodyPr/>
+                    <a:lstStyle/>
+                    <a:p>
+                      <a:pPr algn="l"/>
+                      <a:r>
+                        <a:rPr sz="1100" b="1" i="0">
+                          <a:solidFill>
+                            <a:srgbClr val="2B2B2B"/>
+                          </a:solidFill>
+                          <a:latin typeface="Calibri"/>
+                        </a:rPr>
+                        <a:t>4%</a:t>
+                      </a:r>
+                    </a:p>
+                  </a:txBody>
+                  <a:tcPr anchor="ctr" marL="109728" marR="91440" marT="36576" marB="36576">
+                    <a:solidFill>
+                      <a:srgbClr val="F2F2F2"/>
+                    </a:solidFill>
+                  </a:tcPr>
+                </a:tc>
+                <a:tc>
+                  <a:txBody>
+                    <a:bodyPr/>
+                    <a:lstStyle/>
+                    <a:p>
+                      <a:pPr algn="l"/>
+                      <a:r>
+                        <a:rPr sz="1100" b="0" i="0">
+                          <a:solidFill>
+                            <a:srgbClr val="2B2B2B"/>
+                          </a:solidFill>
+                          <a:latin typeface="Calibri"/>
+                        </a:rPr>
+                        <a:t>27/10/2026</a:t>
+                      </a:r>
+                    </a:p>
+                  </a:txBody>
+                  <a:tcPr anchor="ctr" marL="109728" marR="91440" marT="36576" marB="36576">
+                    <a:solidFill>
+                      <a:srgbClr val="F2F2F2"/>
+                    </a:solidFill>
+                  </a:tcPr>
+                </a:tc>
+              </a:tr>
+              <a:tr h="477520">
+                <a:tc>
+                  <a:txBody>
+                    <a:bodyPr/>
+                    <a:lstStyle/>
+                    <a:p>
+                      <a:pPr algn="l"/>
+                      <a:r>
+                        <a:rPr sz="1100" b="1" i="0">
+                          <a:solidFill>
+                            <a:srgbClr val="2B2B2B"/>
+                          </a:solidFill>
+                          <a:latin typeface="Calibri"/>
+                        </a:rPr>
+                        <a:t>Autoevaluación</a:t>
+                      </a:r>
+                    </a:p>
+                  </a:txBody>
+                  <a:tcPr anchor="ctr" marL="109728" marR="91440" marT="36576" marB="36576">
+                    <a:solidFill>
+                      <a:srgbClr val="FFFFFF"/>
+                    </a:solidFill>
+                  </a:tcPr>
+                </a:tc>
+                <a:tc>
+                  <a:txBody>
+                    <a:bodyPr/>
+                    <a:lstStyle/>
+                    <a:p>
+                      <a:pPr algn="l"/>
+                      <a:r>
+                        <a:rPr sz="1100" b="0" i="0">
+                          <a:solidFill>
+                            <a:srgbClr val="2B2B2B"/>
+                          </a:solidFill>
+                          <a:latin typeface="Calibri"/>
+                        </a:rPr>
+                        <a:t>Cuestionario</a:t>
+                      </a:r>
+                    </a:p>
+                  </a:txBody>
+                  <a:tcPr anchor="ctr" marL="109728" marR="91440" marT="36576" marB="36576">
+                    <a:solidFill>
+                      <a:srgbClr val="FFFFFF"/>
+                    </a:solidFill>
+                  </a:tcPr>
+                </a:tc>
+                <a:tc>
+                  <a:txBody>
+                    <a:bodyPr/>
+                    <a:lstStyle/>
+                    <a:p>
+                      <a:pPr algn="l"/>
+                      <a:r>
+                        <a:rPr sz="1100" b="0" i="0">
+                          <a:solidFill>
+                            <a:srgbClr val="2B2B2B"/>
+                          </a:solidFill>
+                          <a:latin typeface="Calibri"/>
+                        </a:rPr>
+                        <a:t>3 (40%)</a:t>
+                      </a:r>
+                    </a:p>
+                  </a:txBody>
+                  <a:tcPr anchor="ctr" marL="109728" marR="91440" marT="36576" marB="36576">
+                    <a:solidFill>
+                      <a:srgbClr val="FFFFFF"/>
+                    </a:solidFill>
+                  </a:tcPr>
+                </a:tc>
+                <a:tc>
+                  <a:txBody>
+                    <a:bodyPr/>
+                    <a:lstStyle/>
+                    <a:p>
+                      <a:pPr algn="l"/>
+                      <a:r>
+                        <a:rPr sz="1100" b="1" i="0">
+                          <a:solidFill>
+                            <a:srgbClr val="2B2B2B"/>
+                          </a:solidFill>
+                          <a:latin typeface="Calibri"/>
+                        </a:rPr>
+                        <a:t>2%</a:t>
+                      </a:r>
+                    </a:p>
+                  </a:txBody>
+                  <a:tcPr anchor="ctr" marL="109728" marR="91440" marT="36576" marB="36576">
+                    <a:solidFill>
+                      <a:srgbClr val="FFFFFF"/>
+                    </a:solidFill>
+                  </a:tcPr>
+                </a:tc>
+                <a:tc>
+                  <a:txBody>
+                    <a:bodyPr/>
+                    <a:lstStyle/>
+                    <a:p>
+                      <a:pPr algn="l"/>
+                      <a:r>
+                        <a:rPr sz="1100" b="0" i="0">
+                          <a:solidFill>
+                            <a:srgbClr val="2B2B2B"/>
+                          </a:solidFill>
+                          <a:latin typeface="Calibri"/>
+                        </a:rPr>
+                        <a:t>15/11/2026 (54450) · 22/11/2026 (54466/54467)</a:t>
+                      </a:r>
+                    </a:p>
+                  </a:txBody>
+                  <a:tcPr anchor="ctr" marL="109728" marR="91440" marT="36576" marB="36576">
+                    <a:solidFill>
+                      <a:srgbClr val="FFFFFF"/>
+                    </a:solidFill>
+                  </a:tcPr>
+                </a:tc>
+              </a:tr>
+              <a:tr h="477520">
+                <a:tc>
+                  <a:txBody>
+                    <a:bodyPr/>
+                    <a:lstStyle/>
+                    <a:p>
+                      <a:pPr algn="l"/>
+                      <a:r>
+                        <a:rPr sz="1100" b="1" i="0">
+                          <a:solidFill>
+                            <a:srgbClr val="2B2B2B"/>
+                          </a:solidFill>
+                          <a:latin typeface="Calibri"/>
+                        </a:rPr>
+                        <a:t>Coevaluación</a:t>
+                      </a:r>
+                    </a:p>
+                  </a:txBody>
+                  <a:tcPr anchor="ctr" marL="109728" marR="91440" marT="36576" marB="36576">
+                    <a:solidFill>
+                      <a:srgbClr val="F2F2F2"/>
+                    </a:solidFill>
+                  </a:tcPr>
+                </a:tc>
+                <a:tc>
+                  <a:txBody>
+                    <a:bodyPr/>
+                    <a:lstStyle/>
+                    <a:p>
+                      <a:pPr algn="l"/>
+                      <a:r>
+                        <a:rPr sz="1100" b="0" i="0">
+                          <a:solidFill>
+                            <a:srgbClr val="2B2B2B"/>
+                          </a:solidFill>
+                          <a:latin typeface="Calibri"/>
+                        </a:rPr>
+                        <a:t>Foro</a:t>
+                      </a:r>
+                    </a:p>
+                  </a:txBody>
+                  <a:tcPr anchor="ctr" marL="109728" marR="91440" marT="36576" marB="36576">
+                    <a:solidFill>
+                      <a:srgbClr val="F2F2F2"/>
+                    </a:solidFill>
+                  </a:tcPr>
+                </a:tc>
+                <a:tc>
+                  <a:txBody>
+                    <a:bodyPr/>
+                    <a:lstStyle/>
+                    <a:p>
+                      <a:pPr algn="l"/>
+                      <a:r>
+                        <a:rPr sz="1100" b="0" i="0">
+                          <a:solidFill>
+                            <a:srgbClr val="2B2B2B"/>
+                          </a:solidFill>
+                          <a:latin typeface="Calibri"/>
+                        </a:rPr>
+                        <a:t>3 (40%)</a:t>
+                      </a:r>
+                    </a:p>
+                  </a:txBody>
+                  <a:tcPr anchor="ctr" marL="109728" marR="91440" marT="36576" marB="36576">
+                    <a:solidFill>
+                      <a:srgbClr val="F2F2F2"/>
+                    </a:solidFill>
+                  </a:tcPr>
+                </a:tc>
+                <a:tc>
+                  <a:txBody>
+                    <a:bodyPr/>
+                    <a:lstStyle/>
+                    <a:p>
+                      <a:pPr algn="l"/>
+                      <a:r>
+                        <a:rPr sz="1100" b="1" i="0">
+                          <a:solidFill>
+                            <a:srgbClr val="2B2B2B"/>
+                          </a:solidFill>
+                          <a:latin typeface="Calibri"/>
+                        </a:rPr>
+                        <a:t>2%</a:t>
+                      </a:r>
+                    </a:p>
+                  </a:txBody>
+                  <a:tcPr anchor="ctr" marL="109728" marR="91440" marT="36576" marB="36576">
+                    <a:solidFill>
+                      <a:srgbClr val="F2F2F2"/>
+                    </a:solidFill>
+                  </a:tcPr>
+                </a:tc>
+                <a:tc>
+                  <a:txBody>
+                    <a:bodyPr/>
+                    <a:lstStyle/>
+                    <a:p>
+                      <a:pPr algn="l"/>
+                      <a:r>
+                        <a:rPr sz="1100" b="0" i="0">
+                          <a:solidFill>
+                            <a:srgbClr val="2B2B2B"/>
+                          </a:solidFill>
+                          <a:latin typeface="Calibri"/>
+                        </a:rPr>
+                        <a:t>15/11/2026 (54450) · 22/11/2026 (54466/54467)</a:t>
+                      </a:r>
+                    </a:p>
+                  </a:txBody>
+                  <a:tcPr anchor="ctr" marL="109728" marR="91440" marT="36576" marB="36576">
+                    <a:solidFill>
+                      <a:srgbClr val="F2F2F2"/>
+                    </a:solidFill>
+                  </a:tcPr>
+                </a:tc>
+              </a:tr>
+            </a:tbl>
+          </a:graphicData>
+        </a:graphic>
+      </p:graphicFrame>
+      <p:sp>
+        <p:nvSpPr>
+          <p:cNvPr id="6" name="TextBox 5"/>
           <p:cNvSpPr txBox="1"/>
           <p:nvPr/>
         </p:nvSpPr>
@@ -6901,65 +8584,21 @@
                 </a:solidFill>
                 <a:latin typeface="Calibri"/>
               </a:rPr>
-              <a:t>ACUERDOS DEL CURSO</a:t>
-            </a:r>
-          </a:p>
-        </p:txBody>
-      </p:sp>
-      <p:sp>
-        <p:nvSpPr>
-          <p:cNvPr id="4" name="Rounded Rectangle 3"/>
-          <p:cNvSpPr/>
-          <p:nvPr/>
-        </p:nvSpPr>
-        <p:spPr>
-          <a:xfrm>
-            <a:off x="640080" y="1737360"/>
-            <a:ext cx="10911535" cy="713232"/>
-          </a:xfrm>
-          <a:prstGeom prst="roundRect">
-            <a:avLst/>
-          </a:prstGeom>
-          <a:solidFill>
-            <a:srgbClr val="E8F5EC"/>
-          </a:solidFill>
-          <a:ln>
-            <a:noFill/>
-          </a:ln>
-          <a:effectLst/>
-        </p:spPr>
-        <p:style>
-          <a:lnRef idx="1">
-            <a:schemeClr val="accent1"/>
-          </a:lnRef>
-          <a:fillRef idx="3">
-            <a:schemeClr val="accent1"/>
-          </a:fillRef>
-          <a:effectRef idx="2">
-            <a:schemeClr val="accent1"/>
-          </a:effectRef>
-          <a:fontRef idx="minor">
-            <a:schemeClr val="lt1"/>
-          </a:fontRef>
-        </p:style>
-        <p:txBody>
-          <a:bodyPr rtlCol="0" anchor="ctr"/>
-          <a:lstStyle/>
-          <a:p>
-            <a:pPr algn="ctr"/>
-          </a:p>
-        </p:txBody>
-      </p:sp>
-      <p:sp>
-        <p:nvSpPr>
-          <p:cNvPr id="5" name="TextBox 4"/>
+              <a:t>ALCANCE DE LA EVALUACIÓN</a:t>
+            </a:r>
+          </a:p>
+        </p:txBody>
+      </p:sp>
+      <p:sp>
+        <p:nvSpPr>
+          <p:cNvPr id="4" name="TextBox 3"/>
           <p:cNvSpPr txBox="1"/>
           <p:nvPr/>
         </p:nvSpPr>
         <p:spPr>
           <a:xfrm>
-            <a:off x="868680" y="1847088"/>
-            <a:ext cx="10454335" cy="493776"/>
+            <a:off x="640080" y="1691639"/>
+            <a:ext cx="10911535" cy="4617720"/>
           </a:xfrm>
           <a:prstGeom prst="rect">
             <a:avLst/>
@@ -6972,21 +8611,62 @@
           </a:bodyPr>
           <a:lstStyle/>
           <a:p>
+            <a:pPr>
+              <a:spcAft>
+                <a:spcPts val="1000"/>
+              </a:spcAft>
+            </a:pPr>
+            <a:r>
+              <a:rPr sz="1300" b="0" i="0">
+                <a:solidFill>
+                  <a:srgbClr val="2B2B2B"/>
+                </a:solidFill>
+                <a:latin typeface="Calibri"/>
+              </a:rPr>
+              <a:t>–   </a:t>
+            </a:r>
             <a:r>
               <a:rPr sz="1300" b="1" i="0">
                 <a:solidFill>
-                  <a:srgbClr val="0C2340"/>
-                </a:solidFill>
-                <a:latin typeface="Calibri"/>
-              </a:rPr>
-              <a:t>ℹ️ Nota institucional</a:t>
+                  <a:srgbClr val="2B2B2B"/>
+                </a:solidFill>
+                <a:latin typeface="Calibri"/>
+              </a:rPr>
+              <a:t>Régimen:</a:t>
+            </a:r>
+            <a:r>
+              <a:rPr sz="1300" b="0" i="0">
+                <a:solidFill>
+                  <a:srgbClr val="2B2B2B"/>
+                </a:solidFill>
+                <a:latin typeface="Calibri"/>
+              </a:rPr>
+              <a:t> Art. 52 · </a:t>
+            </a:r>
+            <a:r>
+              <a:rPr sz="1300" b="1" i="0">
+                <a:solidFill>
+                  <a:srgbClr val="2B2B2B"/>
+                </a:solidFill>
+                <a:latin typeface="Calibri"/>
+              </a:rPr>
+              <a:t>tres cortes 30% / 30% / 40%</a:t>
+            </a:r>
+            <a:r>
+              <a:rPr sz="1300" b="0" i="0">
+                <a:solidFill>
+                  <a:srgbClr val="2B2B2B"/>
+                </a:solidFill>
+                <a:latin typeface="Calibri"/>
+              </a:rPr>
+              <a:t> según el libro de calificaciones del aula (el Syllabus SIAC 94532 declaraba «corte único 100%»: manda el aula).</a:t>
             </a:r>
           </a:p>
           <a:p>
             <a:pPr>
-              <a:spcBef>
-                <a:spcPts val="400"/>
-              </a:spcBef>
+              <a:spcAft>
+                <a:spcPts val="1000"/>
+              </a:spcAft>
             </a:pPr>
             <a:r>
               <a:rPr sz="1300" b="0" i="0">
@@ -6995,7 +8675,7 @@
                 </a:solidFill>
                 <a:latin typeface="Calibri"/>
               </a:rPr>
-              <a:t>Encuentro: </a:t>
+              <a:t>–   </a:t>
             </a:r>
             <a:r>
               <a:rPr sz="1300" b="1" i="0">
@@ -7004,7 +8684,7 @@
                 </a:solidFill>
                 <a:latin typeface="Calibri"/>
               </a:rPr>
-              <a:t>Martes, 5:00 pm – 6:00 pm</a:t>
+              <a:t>Cada corte se compone de ítems concretos del aula</a:t>
             </a:r>
             <a:r>
               <a:rPr sz="1300" b="0" i="0">
@@ -7013,92 +8693,84 @@
                 </a:solidFill>
                 <a:latin typeface="Calibri"/>
               </a:rPr>
-              <a:t>. El Meet es el mismo enlace para toda la serie.</a:t>
-            </a:r>
-          </a:p>
-        </p:txBody>
-      </p:sp>
-      <p:sp>
-        <p:nvSpPr>
-          <p:cNvPr id="6" name="Rounded Rectangle 5"/>
-          <p:cNvSpPr/>
-          <p:nvPr/>
-        </p:nvSpPr>
-        <p:spPr>
-          <a:xfrm>
-            <a:off x="640080" y="2679191"/>
-            <a:ext cx="10911535" cy="713232"/>
-          </a:xfrm>
-          <a:prstGeom prst="roundRect">
-            <a:avLst/>
-          </a:prstGeom>
-          <a:solidFill>
-            <a:srgbClr val="FDECD8"/>
-          </a:solidFill>
-          <a:ln>
-            <a:noFill/>
-          </a:ln>
-          <a:effectLst/>
-        </p:spPr>
-        <p:style>
-          <a:lnRef idx="1">
-            <a:schemeClr val="accent1"/>
-          </a:lnRef>
-          <a:fillRef idx="3">
-            <a:schemeClr val="accent1"/>
-          </a:fillRef>
-          <a:effectRef idx="2">
-            <a:schemeClr val="accent1"/>
-          </a:effectRef>
-          <a:fontRef idx="minor">
-            <a:schemeClr val="lt1"/>
-          </a:fontRef>
-        </p:style>
-        <p:txBody>
-          <a:bodyPr rtlCol="0" anchor="ctr"/>
-          <a:lstStyle/>
-          <a:p>
-            <a:pPr algn="ctr"/>
-          </a:p>
-        </p:txBody>
-      </p:sp>
-      <p:sp>
-        <p:nvSpPr>
-          <p:cNvPr id="7" name="TextBox 6"/>
-          <p:cNvSpPr txBox="1"/>
-          <p:nvPr/>
-        </p:nvSpPr>
-        <p:spPr>
-          <a:xfrm>
-            <a:off x="868680" y="2788920"/>
-            <a:ext cx="10454335" cy="493776"/>
-          </a:xfrm>
-          <a:prstGeom prst="rect">
-            <a:avLst/>
-          </a:prstGeom>
-          <a:noFill/>
-        </p:spPr>
-        <p:txBody>
-          <a:bodyPr wrap="square" anchor="t" lIns="0" rIns="0" tIns="0" bIns="0">
-            <a:spAutoFit/>
-          </a:bodyPr>
-          <a:lstStyle/>
-          <a:p>
+              <a:t> — nombre exacto, tipo de actividad, peso y cierre: en la tabla «CÓMO SE CALIFICA» de esta presentación.</a:t>
+            </a:r>
+          </a:p>
+          <a:p>
+            <a:pPr>
+              <a:spcAft>
+                <a:spcPts val="1000"/>
+              </a:spcAft>
+            </a:pPr>
+            <a:r>
+              <a:rPr sz="1300" b="0" i="0">
+                <a:solidFill>
+                  <a:srgbClr val="2B2B2B"/>
+                </a:solidFill>
+                <a:latin typeface="Calibri"/>
+              </a:rPr>
+              <a:t>–   </a:t>
+            </a:r>
             <a:r>
               <a:rPr sz="1300" b="1" i="0">
                 <a:solidFill>
-                  <a:srgbClr val="0C2340"/>
-                </a:solidFill>
-                <a:latin typeface="Calibri"/>
-              </a:rPr>
-              <a:t>💡 Aclaración</a:t>
+                  <a:srgbClr val="2B2B2B"/>
+                </a:solidFill>
+                <a:latin typeface="Calibri"/>
+              </a:rPr>
+              <a:t>Autoevaluación (2%, cuestionario)</a:t>
+            </a:r>
+            <a:r>
+              <a:rPr sz="1300" b="0" i="0">
+                <a:solidFill>
+                  <a:srgbClr val="2B2B2B"/>
+                </a:solidFill>
+                <a:latin typeface="Calibri"/>
+              </a:rPr>
+              <a:t> y </a:t>
+            </a:r>
+            <a:r>
+              <a:rPr sz="1300" b="1" i="0">
+                <a:solidFill>
+                  <a:srgbClr val="2B2B2B"/>
+                </a:solidFill>
+                <a:latin typeface="Calibri"/>
+              </a:rPr>
+              <a:t>coevaluación (2%, foro)</a:t>
+            </a:r>
+            <a:r>
+              <a:rPr sz="1300" b="0" i="0">
+                <a:solidFill>
+                  <a:srgbClr val="2B2B2B"/>
+                </a:solidFill>
+                <a:latin typeface="Calibri"/>
+              </a:rPr>
+              <a:t> </a:t>
+            </a:r>
+            <a:r>
+              <a:rPr sz="1300" b="1" i="0">
+                <a:solidFill>
+                  <a:srgbClr val="2B2B2B"/>
+                </a:solidFill>
+                <a:latin typeface="Calibri"/>
+              </a:rPr>
+              <a:t>sí hacen parte</a:t>
+            </a:r>
+            <a:r>
+              <a:rPr sz="1300" b="0" i="0">
+                <a:solidFill>
+                  <a:srgbClr val="2B2B2B"/>
+                </a:solidFill>
+                <a:latin typeface="Calibri"/>
+              </a:rPr>
+              <a:t> de la nota de este curso: van en el tercer corte y se diligencian/participan en el aula.</a:t>
             </a:r>
           </a:p>
           <a:p>
             <a:pPr>
-              <a:spcBef>
-                <a:spcPts val="400"/>
-              </a:spcBef>
+              <a:spcAft>
+                <a:spcPts val="1000"/>
+              </a:spcAft>
             </a:pPr>
             <a:r>
               <a:rPr sz="1300" b="0" i="0">
@@ -7107,7 +8779,7 @@
                 </a:solidFill>
                 <a:latin typeface="Calibri"/>
               </a:rPr>
-              <a:t>Martes festivo = </a:t>
+              <a:t>–   Los </a:t>
             </a:r>
             <a:r>
               <a:rPr sz="1300" b="1" i="0">
@@ -7116,7 +8788,7 @@
                 </a:solidFill>
                 <a:latin typeface="Calibri"/>
               </a:rPr>
-              <a:t>clase autónoma</a:t>
+              <a:t>quices y parciales</a:t>
             </a:r>
             <a:r>
               <a:rPr sz="1300" b="0" i="0">
@@ -7125,92 +8797,32 @@
                 </a:solidFill>
                 <a:latin typeface="Calibri"/>
               </a:rPr>
-              <a:t> (avance guiado en el CDigital).</a:t>
-            </a:r>
-          </a:p>
-        </p:txBody>
-      </p:sp>
-      <p:sp>
-        <p:nvSpPr>
-          <p:cNvPr id="8" name="Rounded Rectangle 7"/>
-          <p:cNvSpPr/>
-          <p:nvPr/>
-        </p:nvSpPr>
-        <p:spPr>
-          <a:xfrm>
-            <a:off x="640080" y="3621024"/>
-            <a:ext cx="10911535" cy="713232"/>
-          </a:xfrm>
-          <a:prstGeom prst="roundRect">
-            <a:avLst/>
-          </a:prstGeom>
-          <a:solidFill>
-            <a:srgbClr val="FBE4E4"/>
-          </a:solidFill>
-          <a:ln>
-            <a:noFill/>
-          </a:ln>
-          <a:effectLst/>
-        </p:spPr>
-        <p:style>
-          <a:lnRef idx="1">
-            <a:schemeClr val="accent1"/>
-          </a:lnRef>
-          <a:fillRef idx="3">
-            <a:schemeClr val="accent1"/>
-          </a:fillRef>
-          <a:effectRef idx="2">
-            <a:schemeClr val="accent1"/>
-          </a:effectRef>
-          <a:fontRef idx="minor">
-            <a:schemeClr val="lt1"/>
-          </a:fontRef>
-        </p:style>
-        <p:txBody>
-          <a:bodyPr rtlCol="0" anchor="ctr"/>
-          <a:lstStyle/>
-          <a:p>
-            <a:pPr algn="ctr"/>
-          </a:p>
-        </p:txBody>
-      </p:sp>
-      <p:sp>
-        <p:nvSpPr>
-          <p:cNvPr id="9" name="TextBox 8"/>
-          <p:cNvSpPr txBox="1"/>
-          <p:nvPr/>
-        </p:nvSpPr>
-        <p:spPr>
-          <a:xfrm>
-            <a:off x="868680" y="3730752"/>
-            <a:ext cx="10454335" cy="493776"/>
-          </a:xfrm>
-          <a:prstGeom prst="rect">
-            <a:avLst/>
-          </a:prstGeom>
-          <a:noFill/>
-        </p:spPr>
-        <p:txBody>
-          <a:bodyPr wrap="square" anchor="t" lIns="0" rIns="0" tIns="0" bIns="0">
-            <a:spAutoFit/>
-          </a:bodyPr>
-          <a:lstStyle/>
-          <a:p>
+              <a:t> son cuestionarios en CDigital y cierran en día de clase; la </a:t>
+            </a:r>
             <a:r>
               <a:rPr sz="1300" b="1" i="0">
                 <a:solidFill>
-                  <a:srgbClr val="0C2340"/>
-                </a:solidFill>
-                <a:latin typeface="Calibri"/>
-              </a:rPr>
-              <a:t>⚠️ Importante</a:t>
+                  <a:srgbClr val="2B2B2B"/>
+                </a:solidFill>
+                <a:latin typeface="Calibri"/>
+              </a:rPr>
+              <a:t>ACA Final</a:t>
+            </a:r>
+            <a:r>
+              <a:rPr sz="1300" b="0" i="0">
+                <a:solidFill>
+                  <a:srgbClr val="2B2B2B"/>
+                </a:solidFill>
+                <a:latin typeface="Calibri"/>
+              </a:rPr>
+              <a:t> es una tarea (documento) y cierra en la fecha máxima de recepción.</a:t>
             </a:r>
           </a:p>
           <a:p>
             <a:pPr>
-              <a:spcBef>
-                <a:spcPts val="400"/>
-              </a:spcBef>
+              <a:spcAft>
+                <a:spcPts val="1000"/>
+              </a:spcAft>
             </a:pPr>
             <a:r>
               <a:rPr sz="1300" b="0" i="0">
@@ -7219,14 +8831,100 @@
                 </a:solidFill>
                 <a:latin typeface="Calibri"/>
               </a:rPr>
-              <a:t>Antes de la sustentación: verificación antiplagio (unidad 12) y póster listo.</a:t>
-            </a:r>
-          </a:p>
-        </p:txBody>
-      </p:sp>
-      <p:sp>
-        <p:nvSpPr>
-          <p:cNvPr id="10" name="TextBox 9"/>
+              <a:t>–   No confundir con la autoevaluación </a:t>
+            </a:r>
+            <a:r>
+              <a:rPr sz="1300" b="1" i="0">
+                <a:solidFill>
+                  <a:srgbClr val="2B2B2B"/>
+                </a:solidFill>
+                <a:latin typeface="Calibri"/>
+              </a:rPr>
+              <a:t>institucional</a:t>
+            </a:r>
+            <a:r>
+              <a:rPr sz="1300" b="0" i="0">
+                <a:solidFill>
+                  <a:srgbClr val="2B2B2B"/>
+                </a:solidFill>
+                <a:latin typeface="Calibri"/>
+              </a:rPr>
+              <a:t> SIAC (calidad de programas en acreditacion.cun.edu.co): esa no es una nota del curso.</a:t>
+            </a:r>
+          </a:p>
+          <a:p>
+            <a:pPr>
+              <a:spcAft>
+                <a:spcPts val="1000"/>
+              </a:spcAft>
+            </a:pPr>
+            <a:r>
+              <a:rPr sz="1300" b="0" i="0">
+                <a:solidFill>
+                  <a:srgbClr val="2B2B2B"/>
+                </a:solidFill>
+                <a:latin typeface="Calibri"/>
+              </a:rPr>
+              <a:t>–   Entregas, rúbricas y publicación de notas: solo por </a:t>
+            </a:r>
+            <a:r>
+              <a:rPr sz="1300" b="1" i="0">
+                <a:solidFill>
+                  <a:srgbClr val="2B2B2B"/>
+                </a:solidFill>
+                <a:latin typeface="Calibri"/>
+              </a:rPr>
+              <a:t>CDigital</a:t>
+            </a:r>
+            <a:r>
+              <a:rPr sz="1300" b="0" i="0">
+                <a:solidFill>
+                  <a:srgbClr val="2B2B2B"/>
+                </a:solidFill>
+                <a:latin typeface="Calibri"/>
+              </a:rPr>
+              <a:t>.</a:t>
+            </a:r>
+          </a:p>
+          <a:p>
+            <a:pPr>
+              <a:spcAft>
+                <a:spcPts val="1000"/>
+              </a:spcAft>
+            </a:pPr>
+            <a:r>
+              <a:rPr sz="1300" b="0" i="0">
+                <a:solidFill>
+                  <a:srgbClr val="2B2B2B"/>
+                </a:solidFill>
+                <a:latin typeface="Calibri"/>
+              </a:rPr>
+              <a:t>–   Si un peso o una ventana del aula no coincide con este material, </a:t>
+            </a:r>
+            <a:r>
+              <a:rPr sz="1300" b="1" i="0">
+                <a:solidFill>
+                  <a:srgbClr val="2B2B2B"/>
+                </a:solidFill>
+                <a:latin typeface="Calibri"/>
+              </a:rPr>
+              <a:t>manda el aula</a:t>
+            </a:r>
+            <a:r>
+              <a:rPr sz="1300" b="0" i="0">
+                <a:solidFill>
+                  <a:srgbClr val="2B2B2B"/>
+                </a:solidFill>
+                <a:latin typeface="Calibri"/>
+              </a:rPr>
+              <a:t>: se corrige aquí y se avisa en clase.</a:t>
+            </a:r>
+          </a:p>
+        </p:txBody>
+      </p:sp>
+      <p:sp>
+        <p:nvSpPr>
+          <p:cNvPr id="5" name="TextBox 4"/>
           <p:cNvSpPr txBox="1"/>
           <p:nvPr/>
         </p:nvSpPr>
@@ -7359,21 +9057,65 @@
                 </a:solidFill>
                 <a:latin typeface="Calibri"/>
               </a:rPr>
-              <a:t>RECURSOS</a:t>
-            </a:r>
-          </a:p>
-        </p:txBody>
-      </p:sp>
-      <p:sp>
-        <p:nvSpPr>
-          <p:cNvPr id="4" name="TextBox 3"/>
+              <a:t>ACUERDOS DEL CURSO</a:t>
+            </a:r>
+          </a:p>
+        </p:txBody>
+      </p:sp>
+      <p:sp>
+        <p:nvSpPr>
+          <p:cNvPr id="4" name="Rounded Rectangle 3"/>
+          <p:cNvSpPr/>
+          <p:nvPr/>
+        </p:nvSpPr>
+        <p:spPr>
+          <a:xfrm>
+            <a:off x="640080" y="1737360"/>
+            <a:ext cx="10911535" cy="713232"/>
+          </a:xfrm>
+          <a:prstGeom prst="roundRect">
+            <a:avLst/>
+          </a:prstGeom>
+          <a:solidFill>
+            <a:srgbClr val="E8F5EC"/>
+          </a:solidFill>
+          <a:ln>
+            <a:noFill/>
+          </a:ln>
+          <a:effectLst/>
+        </p:spPr>
+        <p:style>
+          <a:lnRef idx="1">
+            <a:schemeClr val="accent1"/>
+          </a:lnRef>
+          <a:fillRef idx="3">
+            <a:schemeClr val="accent1"/>
+          </a:fillRef>
+          <a:effectRef idx="2">
+            <a:schemeClr val="accent1"/>
+          </a:effectRef>
+          <a:fontRef idx="minor">
+            <a:schemeClr val="lt1"/>
+          </a:fontRef>
+        </p:style>
+        <p:txBody>
+          <a:bodyPr rtlCol="0" anchor="ctr"/>
+          <a:lstStyle/>
+          <a:p>
+            <a:pPr algn="ctr"/>
+          </a:p>
+        </p:txBody>
+      </p:sp>
+      <p:sp>
+        <p:nvSpPr>
+          <p:cNvPr id="5" name="TextBox 4"/>
           <p:cNvSpPr txBox="1"/>
           <p:nvPr/>
         </p:nvSpPr>
         <p:spPr>
           <a:xfrm>
-            <a:off x="640080" y="1691639"/>
-            <a:ext cx="10911535" cy="4617720"/>
+            <a:off x="868680" y="1847088"/>
+            <a:ext cx="10454335" cy="493776"/>
           </a:xfrm>
           <a:prstGeom prst="rect">
             <a:avLst/>
@@ -7386,300 +9128,261 @@
           </a:bodyPr>
           <a:lstStyle/>
           <a:p>
+            <a:r>
+              <a:rPr sz="1300" b="1" i="0">
+                <a:solidFill>
+                  <a:srgbClr val="0C2340"/>
+                </a:solidFill>
+                <a:latin typeface="Calibri"/>
+              </a:rPr>
+              <a:t>ℹ️ Nota institucional</a:t>
+            </a:r>
+          </a:p>
+          <a:p>
             <a:pPr>
-              <a:spcAft>
-                <a:spcPts val="1000"/>
-              </a:spcAft>
+              <a:spcBef>
+                <a:spcPts val="400"/>
+              </a:spcBef>
             </a:pPr>
             <a:r>
-              <a:rPr sz="1600" b="0" i="0">
-                <a:solidFill>
-                  <a:srgbClr val="2B2B2B"/>
-                </a:solidFill>
-                <a:latin typeface="Calibri"/>
-              </a:rPr>
-              <a:t>–   </a:t>
-            </a:r>
-            <a:r>
-              <a:rPr sz="1600" b="1" i="0">
-                <a:solidFill>
-                  <a:srgbClr val="2B2B2B"/>
-                </a:solidFill>
-                <a:latin typeface="Calibri"/>
-              </a:rPr>
-              <a:t>Contacto del Docente:</a:t>
-            </a:r>
-            <a:r>
-              <a:rPr sz="1600" b="0" i="0">
-                <a:solidFill>
-                  <a:srgbClr val="2B2B2B"/>
-                </a:solidFill>
-                <a:latin typeface="Calibri"/>
-              </a:rPr>
-              <a:t> julian_castanoe@cun.edu.co</a:t>
+              <a:rPr sz="1300" b="0" i="0">
+                <a:solidFill>
+                  <a:srgbClr val="2B2B2B"/>
+                </a:solidFill>
+                <a:latin typeface="Calibri"/>
+              </a:rPr>
+              <a:t>Encuentro: </a:t>
+            </a:r>
+            <a:r>
+              <a:rPr sz="1300" b="1" i="0">
+                <a:solidFill>
+                  <a:srgbClr val="2B2B2B"/>
+                </a:solidFill>
+                <a:latin typeface="Calibri"/>
+              </a:rPr>
+              <a:t>Martes, 5:00 pm – 6:00 pm</a:t>
+            </a:r>
+            <a:r>
+              <a:rPr sz="1300" b="0" i="0">
+                <a:solidFill>
+                  <a:srgbClr val="2B2B2B"/>
+                </a:solidFill>
+                <a:latin typeface="Calibri"/>
+              </a:rPr>
+              <a:t>. El Meet es el mismo enlace para toda la serie.</a:t>
+            </a:r>
+          </a:p>
+        </p:txBody>
+      </p:sp>
+      <p:sp>
+        <p:nvSpPr>
+          <p:cNvPr id="6" name="Rounded Rectangle 5"/>
+          <p:cNvSpPr/>
+          <p:nvPr/>
+        </p:nvSpPr>
+        <p:spPr>
+          <a:xfrm>
+            <a:off x="640080" y="2679191"/>
+            <a:ext cx="10911535" cy="713232"/>
+          </a:xfrm>
+          <a:prstGeom prst="roundRect">
+            <a:avLst/>
+          </a:prstGeom>
+          <a:solidFill>
+            <a:srgbClr val="FDECD8"/>
+          </a:solidFill>
+          <a:ln>
+            <a:noFill/>
+          </a:ln>
+          <a:effectLst/>
+        </p:spPr>
+        <p:style>
+          <a:lnRef idx="1">
+            <a:schemeClr val="accent1"/>
+          </a:lnRef>
+          <a:fillRef idx="3">
+            <a:schemeClr val="accent1"/>
+          </a:fillRef>
+          <a:effectRef idx="2">
+            <a:schemeClr val="accent1"/>
+          </a:effectRef>
+          <a:fontRef idx="minor">
+            <a:schemeClr val="lt1"/>
+          </a:fontRef>
+        </p:style>
+        <p:txBody>
+          <a:bodyPr rtlCol="0" anchor="ctr"/>
+          <a:lstStyle/>
+          <a:p>
+            <a:pPr algn="ctr"/>
+          </a:p>
+        </p:txBody>
+      </p:sp>
+      <p:sp>
+        <p:nvSpPr>
+          <p:cNvPr id="7" name="TextBox 6"/>
+          <p:cNvSpPr txBox="1"/>
+          <p:nvPr/>
+        </p:nvSpPr>
+        <p:spPr>
+          <a:xfrm>
+            <a:off x="868680" y="2788920"/>
+            <a:ext cx="10454335" cy="493776"/>
+          </a:xfrm>
+          <a:prstGeom prst="rect">
+            <a:avLst/>
+          </a:prstGeom>
+          <a:noFill/>
+        </p:spPr>
+        <p:txBody>
+          <a:bodyPr wrap="square" anchor="t" lIns="0" rIns="0" tIns="0" bIns="0">
+            <a:spAutoFit/>
+          </a:bodyPr>
+          <a:lstStyle/>
+          <a:p>
+            <a:r>
+              <a:rPr sz="1300" b="1" i="0">
+                <a:solidFill>
+                  <a:srgbClr val="0C2340"/>
+                </a:solidFill>
+                <a:latin typeface="Calibri"/>
+              </a:rPr>
+              <a:t>💡 Aclaración</a:t>
             </a:r>
           </a:p>
           <a:p>
             <a:pPr>
-              <a:spcAft>
-                <a:spcPts val="1000"/>
-              </a:spcAft>
+              <a:spcBef>
+                <a:spcPts val="400"/>
+              </a:spcBef>
             </a:pPr>
             <a:r>
-              <a:rPr sz="1600" b="0" i="0">
-                <a:solidFill>
-                  <a:srgbClr val="2B2B2B"/>
-                </a:solidFill>
-                <a:latin typeface="Calibri"/>
-              </a:rPr>
-              <a:t>–   </a:t>
-            </a:r>
-            <a:r>
-              <a:rPr sz="1600" b="1" i="0">
-                <a:solidFill>
-                  <a:srgbClr val="2B2B2B"/>
-                </a:solidFill>
-                <a:latin typeface="Calibri"/>
-              </a:rPr>
-              <a:t>CDigital (campus del curso):</a:t>
-            </a:r>
-            <a:r>
-              <a:rPr sz="1600" b="0" i="0">
-                <a:solidFill>
-                  <a:srgbClr val="2B2B2B"/>
-                </a:solidFill>
-                <a:latin typeface="Calibri"/>
-              </a:rPr>
-              <a:t> </a:t>
-            </a:r>
-            <a:r>
-              <a:rPr sz="1600" b="1" i="0">
-                <a:solidFill>
-                  <a:srgbClr val="2B2B2B"/>
-                </a:solidFill>
-                <a:latin typeface="Calibri"/>
-              </a:rPr>
-              <a:t>https://cdigital.cun.edu.co/course/view.php?id=112321</a:t>
+              <a:rPr sz="1300" b="0" i="0">
+                <a:solidFill>
+                  <a:srgbClr val="2B2B2B"/>
+                </a:solidFill>
+                <a:latin typeface="Calibri"/>
+              </a:rPr>
+              <a:t>Martes festivo = </a:t>
+            </a:r>
+            <a:r>
+              <a:rPr sz="1300" b="1" i="0">
+                <a:solidFill>
+                  <a:srgbClr val="2B2B2B"/>
+                </a:solidFill>
+                <a:latin typeface="Calibri"/>
+              </a:rPr>
+              <a:t>clase autónoma</a:t>
+            </a:r>
+            <a:r>
+              <a:rPr sz="1300" b="0" i="0">
+                <a:solidFill>
+                  <a:srgbClr val="2B2B2B"/>
+                </a:solidFill>
+                <a:latin typeface="Calibri"/>
+              </a:rPr>
+              <a:t> (avance guiado en el CDigital).</a:t>
+            </a:r>
+          </a:p>
+        </p:txBody>
+      </p:sp>
+      <p:sp>
+        <p:nvSpPr>
+          <p:cNvPr id="8" name="Rounded Rectangle 7"/>
+          <p:cNvSpPr/>
+          <p:nvPr/>
+        </p:nvSpPr>
+        <p:spPr>
+          <a:xfrm>
+            <a:off x="640080" y="3621024"/>
+            <a:ext cx="10911535" cy="713232"/>
+          </a:xfrm>
+          <a:prstGeom prst="roundRect">
+            <a:avLst/>
+          </a:prstGeom>
+          <a:solidFill>
+            <a:srgbClr val="FBE4E4"/>
+          </a:solidFill>
+          <a:ln>
+            <a:noFill/>
+          </a:ln>
+          <a:effectLst/>
+        </p:spPr>
+        <p:style>
+          <a:lnRef idx="1">
+            <a:schemeClr val="accent1"/>
+          </a:lnRef>
+          <a:fillRef idx="3">
+            <a:schemeClr val="accent1"/>
+          </a:fillRef>
+          <a:effectRef idx="2">
+            <a:schemeClr val="accent1"/>
+          </a:effectRef>
+          <a:fontRef idx="minor">
+            <a:schemeClr val="lt1"/>
+          </a:fontRef>
+        </p:style>
+        <p:txBody>
+          <a:bodyPr rtlCol="0" anchor="ctr"/>
+          <a:lstStyle/>
+          <a:p>
+            <a:pPr algn="ctr"/>
+          </a:p>
+        </p:txBody>
+      </p:sp>
+      <p:sp>
+        <p:nvSpPr>
+          <p:cNvPr id="9" name="TextBox 8"/>
+          <p:cNvSpPr txBox="1"/>
+          <p:nvPr/>
+        </p:nvSpPr>
+        <p:spPr>
+          <a:xfrm>
+            <a:off x="868680" y="3730752"/>
+            <a:ext cx="10454335" cy="493776"/>
+          </a:xfrm>
+          <a:prstGeom prst="rect">
+            <a:avLst/>
+          </a:prstGeom>
+          <a:noFill/>
+        </p:spPr>
+        <p:txBody>
+          <a:bodyPr wrap="square" anchor="t" lIns="0" rIns="0" tIns="0" bIns="0">
+            <a:spAutoFit/>
+          </a:bodyPr>
+          <a:lstStyle/>
+          <a:p>
+            <a:r>
+              <a:rPr sz="1300" b="1" i="0">
+                <a:solidFill>
+                  <a:srgbClr val="0C2340"/>
+                </a:solidFill>
+                <a:latin typeface="Calibri"/>
+              </a:rPr>
+              <a:t>⚠️ Importante</a:t>
             </a:r>
           </a:p>
           <a:p>
             <a:pPr>
-              <a:spcAft>
-                <a:spcPts val="1000"/>
-              </a:spcAft>
+              <a:spcBef>
+                <a:spcPts val="400"/>
+              </a:spcBef>
             </a:pPr>
             <a:r>
-              <a:rPr sz="1600" b="0" i="0">
-                <a:solidFill>
-                  <a:srgbClr val="2B2B2B"/>
-                </a:solidFill>
-                <a:latin typeface="Calibri"/>
-              </a:rPr>
-              <a:t>–   </a:t>
-            </a:r>
-            <a:r>
-              <a:rPr sz="1600" b="1" i="0">
-                <a:solidFill>
-                  <a:srgbClr val="2B2B2B"/>
-                </a:solidFill>
-                <a:latin typeface="Calibri"/>
-              </a:rPr>
-              <a:t>Google Meet (mismo enlace toda la serie):</a:t>
-            </a:r>
-            <a:r>
-              <a:rPr sz="1600" b="0" i="0">
-                <a:solidFill>
-                  <a:srgbClr val="2B2B2B"/>
-                </a:solidFill>
-                <a:latin typeface="Calibri"/>
-              </a:rPr>
-              <a:t> </a:t>
-            </a:r>
-            <a:r>
-              <a:rPr sz="1600" b="1" i="0">
-                <a:solidFill>
-                  <a:srgbClr val="2B2B2B"/>
-                </a:solidFill>
-                <a:latin typeface="Calibri"/>
-              </a:rPr>
-              <a:t>[URL Meet — mismo enlace toda la serie · Trabajo de Grado 3]</a:t>
-            </a:r>
-          </a:p>
-          <a:p>
-            <a:pPr>
-              <a:spcAft>
-                <a:spcPts val="1000"/>
-              </a:spcAft>
-            </a:pPr>
-            <a:r>
-              <a:rPr sz="1600" b="0" i="0">
-                <a:solidFill>
-                  <a:srgbClr val="2B2B2B"/>
-                </a:solidFill>
-                <a:latin typeface="Calibri"/>
-              </a:rPr>
-              <a:t>–   </a:t>
-            </a:r>
-            <a:r>
-              <a:rPr sz="1600" b="1" i="0">
-                <a:solidFill>
-                  <a:srgbClr val="2B2B2B"/>
-                </a:solidFill>
-                <a:latin typeface="Calibri"/>
-              </a:rPr>
-              <a:t>Plantilla APA CUN – Proyecto de Grado</a:t>
-            </a:r>
-            <a:r>
-              <a:rPr sz="1600" b="0" i="0">
-                <a:solidFill>
-                  <a:srgbClr val="2B2B2B"/>
-                </a:solidFill>
-                <a:latin typeface="Calibri"/>
-              </a:rPr>
-              <a:t> (viene en tu carpeta del curso): `Recursos/Plantilla_APA_CUN_Proyecto de grado.docx`.</a:t>
-            </a:r>
-          </a:p>
-          <a:p>
-            <a:pPr>
-              <a:spcAft>
-                <a:spcPts val="1000"/>
-              </a:spcAft>
-            </a:pPr>
-            <a:r>
-              <a:rPr sz="1600" b="0" i="0">
-                <a:solidFill>
-                  <a:srgbClr val="2B2B2B"/>
-                </a:solidFill>
-                <a:latin typeface="Calibri"/>
-              </a:rPr>
-              <a:t>–   </a:t>
-            </a:r>
-            <a:r>
-              <a:rPr sz="1600" b="1" i="0">
-                <a:solidFill>
-                  <a:srgbClr val="2B2B2B"/>
-                </a:solidFill>
-                <a:latin typeface="Calibri"/>
-              </a:rPr>
-              <a:t>Plantilla APA CUN (en tu carpeta):</a:t>
-            </a:r>
-            <a:r>
-              <a:rPr sz="1600" b="0" i="0">
-                <a:solidFill>
-                  <a:srgbClr val="2B2B2B"/>
-                </a:solidFill>
-                <a:latin typeface="Calibri"/>
-              </a:rPr>
-              <a:t> `Recursos/Plantilla_APA_CUN_Proyecto de grado.docx`</a:t>
-            </a:r>
-          </a:p>
-          <a:p>
-            <a:pPr>
-              <a:spcAft>
-                <a:spcPts val="1000"/>
-              </a:spcAft>
-            </a:pPr>
-            <a:r>
-              <a:rPr sz="1600" b="0" i="0">
-                <a:solidFill>
-                  <a:srgbClr val="2B2B2B"/>
-                </a:solidFill>
-                <a:latin typeface="Calibri"/>
-              </a:rPr>
-              <a:t>–   </a:t>
-            </a:r>
-            <a:r>
-              <a:rPr sz="1600" b="1" i="0">
-                <a:solidFill>
-                  <a:srgbClr val="2B2B2B"/>
-                </a:solidFill>
-                <a:latin typeface="Calibri"/>
-              </a:rPr>
-              <a:t>Enunciados ACA / cortes (estudiantes):</a:t>
-            </a:r>
-            <a:r>
-              <a:rPr sz="1600" b="0" i="0">
-                <a:solidFill>
-                  <a:srgbClr val="2B2B2B"/>
-                </a:solidFill>
-                <a:latin typeface="Calibri"/>
-              </a:rPr>
-              <a:t> `Clases/Recursos/ACAs/`.</a:t>
-            </a:r>
-          </a:p>
-          <a:p>
-            <a:pPr>
-              <a:spcAft>
-                <a:spcPts val="1000"/>
-              </a:spcAft>
-            </a:pPr>
-            <a:r>
-              <a:rPr sz="1600" b="0" i="0">
-                <a:solidFill>
-                  <a:srgbClr val="2B2B2B"/>
-                </a:solidFill>
-                <a:latin typeface="Calibri"/>
-              </a:rPr>
-              <a:t>–   </a:t>
-            </a:r>
-            <a:r>
-              <a:rPr sz="1600" b="1" i="0">
-                <a:solidFill>
-                  <a:srgbClr val="2B2B2B"/>
-                </a:solidFill>
-                <a:latin typeface="Calibri"/>
-              </a:rPr>
-              <a:t>Repositorio:</a:t>
-            </a:r>
-            <a:r>
-              <a:rPr sz="1600" b="0" i="0">
-                <a:solidFill>
-                  <a:srgbClr val="2B2B2B"/>
-                </a:solidFill>
-                <a:latin typeface="Calibri"/>
-              </a:rPr>
-              <a:t> carga institucional del trabajo de grado al finalizar la sustentación.</a:t>
-            </a:r>
-          </a:p>
-          <a:p>
-            <a:pPr>
-              <a:spcAft>
-                <a:spcPts val="1000"/>
-              </a:spcAft>
-            </a:pPr>
-            <a:r>
-              <a:rPr sz="1600" b="0" i="0">
-                <a:solidFill>
-                  <a:srgbClr val="2B2B2B"/>
-                </a:solidFill>
-                <a:latin typeface="Calibri"/>
-              </a:rPr>
-              <a:t>–   </a:t>
-            </a:r>
-            <a:r>
-              <a:rPr sz="1600" b="1" i="0">
-                <a:solidFill>
-                  <a:srgbClr val="2B2B2B"/>
-                </a:solidFill>
-                <a:latin typeface="Calibri"/>
-              </a:rPr>
-              <a:t>Entregas y notas oficiales:</a:t>
-            </a:r>
-            <a:r>
-              <a:rPr sz="1600" b="0" i="0">
-                <a:solidFill>
-                  <a:srgbClr val="2B2B2B"/>
-                </a:solidFill>
-                <a:latin typeface="Calibri"/>
-              </a:rPr>
-              <a:t> solo por CDigital del curso.</a:t>
-            </a:r>
-          </a:p>
-        </p:txBody>
-      </p:sp>
-      <p:sp>
-        <p:nvSpPr>
-          <p:cNvPr id="5" name="TextBox 4"/>
+              <a:rPr sz="1300" b="0" i="0">
+                <a:solidFill>
+                  <a:srgbClr val="2B2B2B"/>
+                </a:solidFill>
+                <a:latin typeface="Calibri"/>
+              </a:rPr>
+              <a:t>Antes de la sustentación: verificación antiplagio (unidad 12) y póster listo.</a:t>
+            </a:r>
+          </a:p>
+        </p:txBody>
+      </p:sp>
+      <p:sp>
+        <p:nvSpPr>
+          <p:cNvPr id="10" name="TextBox 9"/>
           <p:cNvSpPr txBox="1"/>
           <p:nvPr/>
         </p:nvSpPr>

--- a/Pregrado/Trabajo de grado 3/Clases/Presentacion del Curso - Trabajo de Grado 3.pptx
+++ b/Pregrado/Trabajo de grado 3/Clases/Presentacion del Curso - Trabajo de Grado 3.pptx
@@ -5929,7 +5929,7 @@
                 </a:solidFill>
                 <a:latin typeface="Calibri"/>
               </a:rPr>
-              <a:t> — Cierre administrativo · recepción (hasta 22 nov).</a:t>
+              <a:t> — Cierre administrativo · recepción de entregables.</a:t>
             </a:r>
           </a:p>
         </p:txBody>
@@ -6929,7 +6929,7 @@
                 </a:solidFill>
                 <a:latin typeface="Calibri"/>
               </a:rPr>
-              <a:t>22/11/2026</a:t>
+              <a:t>17/11/2026</a:t>
             </a:r>
           </a:p>
         </p:txBody>
@@ -8317,7 +8317,7 @@
                           </a:solidFill>
                           <a:latin typeface="Calibri"/>
                         </a:rPr>
-                        <a:t>15/11/2026 (54450) · 22/11/2026 (54466/54467)</a:t>
+                        <a:t>10/11/2026 (54450) · 17/11/2026 (54466/54467)</a:t>
                       </a:r>
                     </a:p>
                   </a:txBody>
@@ -8434,7 +8434,7 @@
                           </a:solidFill>
                           <a:latin typeface="Calibri"/>
                         </a:rPr>
-                        <a:t>15/11/2026 (54450) · 22/11/2026 (54466/54467)</a:t>
+                        <a:t>10/11/2026 (54450) · 17/11/2026 (54466/54467)</a:t>
                       </a:r>
                     </a:p>
                   </a:txBody>

--- a/Pregrado/Trabajo de grado 3/Clases/Presentacion del Curso - Trabajo de Grado 3.pptx
+++ b/Pregrado/Trabajo de grado 3/Clases/Presentacion del Curso - Trabajo de Grado 3.pptx
@@ -3825,6 +3825,76 @@
                 </a:solidFill>
                 <a:latin typeface="Calibri"/>
               </a:rPr>
+              <a:t>Material de clases (Drive):</a:t>
+            </a:r>
+            <a:r>
+              <a:rPr sz="1600" b="0" i="0">
+                <a:solidFill>
+                  <a:srgbClr val="2B2B2B"/>
+                </a:solidFill>
+                <a:latin typeface="Calibri"/>
+              </a:rPr>
+              <a:t> </a:t>
+            </a:r>
+            <a:r>
+              <a:rPr sz="1600" b="1" i="0">
+                <a:solidFill>
+                  <a:srgbClr val="2B2B2B"/>
+                </a:solidFill>
+                <a:latin typeface="Calibri"/>
+              </a:rPr>
+              <a:t>[URL Material de clases — carpeta Clases/ en Drive · Trabajo de Grado 3]</a:t>
+            </a:r>
+            <a:r>
+              <a:rPr sz="1600" b="0" i="0">
+                <a:solidFill>
+                  <a:srgbClr val="2B2B2B"/>
+                </a:solidFill>
+                <a:latin typeface="Calibri"/>
+              </a:rPr>
+              <a:t> — aquí está el material de cada sesión, incluida la de una </a:t>
+            </a:r>
+            <a:r>
+              <a:rPr sz="1600" b="1" i="0">
+                <a:solidFill>
+                  <a:srgbClr val="2B2B2B"/>
+                </a:solidFill>
+                <a:latin typeface="Calibri"/>
+              </a:rPr>
+              <a:t>clase autónoma</a:t>
+            </a:r>
+            <a:r>
+              <a:rPr sz="1600" b="0" i="0">
+                <a:solidFill>
+                  <a:srgbClr val="2B2B2B"/>
+                </a:solidFill>
+                <a:latin typeface="Calibri"/>
+              </a:rPr>
+              <a:t>.</a:t>
+            </a:r>
+          </a:p>
+          <a:p>
+            <a:pPr>
+              <a:spcAft>
+                <a:spcPts val="1000"/>
+              </a:spcAft>
+            </a:pPr>
+            <a:r>
+              <a:rPr sz="1600" b="0" i="0">
+                <a:solidFill>
+                  <a:srgbClr val="2B2B2B"/>
+                </a:solidFill>
+                <a:latin typeface="Calibri"/>
+              </a:rPr>
+              <a:t>–   </a:t>
+            </a:r>
+            <a:r>
+              <a:rPr sz="1600" b="1" i="0">
+                <a:solidFill>
+                  <a:srgbClr val="2B2B2B"/>
+                </a:solidFill>
+                <a:latin typeface="Calibri"/>
+              </a:rPr>
               <a:t>Plantilla APA CUN – Proyecto de Grado</a:t>
             </a:r>
             <a:r>
@@ -4691,7 +4761,7 @@
                 </a:solidFill>
                 <a:latin typeface="Calibri"/>
               </a:rPr>
-              <a:t>Tablero colaborativo (Padlet)</a:t>
+              <a:t>Formulario de Google · encuestas y Q&amp;A en el propio Meet</a:t>
             </a:r>
           </a:p>
         </p:txBody>
@@ -4724,7 +4794,7 @@
               </a:spcAft>
             </a:pPr>
             <a:r>
-              <a:rPr sz="1400" b="0" i="0">
+              <a:rPr sz="1300" b="0" i="0">
                 <a:solidFill>
                   <a:srgbClr val="2B2B2B"/>
                 </a:solidFill>
@@ -4733,22 +4803,22 @@
               <a:t>–   </a:t>
             </a:r>
             <a:r>
-              <a:rPr sz="1400" b="1" i="0">
-                <a:solidFill>
-                  <a:srgbClr val="2B2B2B"/>
-                </a:solidFill>
-                <a:latin typeface="Calibri"/>
-              </a:rPr>
-              <a:t>Escanea o abre:</a:t>
-            </a:r>
-            <a:r>
-              <a:rPr sz="1400" b="0" i="0">
-                <a:solidFill>
-                  <a:srgbClr val="2B2B2B"/>
-                </a:solidFill>
-                <a:latin typeface="Calibri"/>
-              </a:rPr>
-              <a:t> https://padlet.com/andres_dfx/cun-wruz81hmf9k06gd7</a:t>
+              <a:rPr sz="1300" b="1" i="0">
+                <a:solidFill>
+                  <a:srgbClr val="2B2B2B"/>
+                </a:solidFill>
+                <a:latin typeface="Calibri"/>
+              </a:rPr>
+              <a:t>Escanea el QR o abre:</a:t>
+            </a:r>
+            <a:r>
+              <a:rPr sz="1300" b="0" i="0">
+                <a:solidFill>
+                  <a:srgbClr val="2B2B2B"/>
+                </a:solidFill>
+                <a:latin typeface="Calibri"/>
+              </a:rPr>
+              <a:t> [URL Formulario Preséntate — pendiente · TRABAJO DE GRADO 3]</a:t>
             </a:r>
           </a:p>
           <a:p>
@@ -4758,16 +4828,34 @@
               </a:spcAft>
             </a:pPr>
             <a:r>
-              <a:rPr sz="1400" b="0" i="0">
-                <a:solidFill>
-                  <a:srgbClr val="2B2B2B"/>
-                </a:solidFill>
-                <a:latin typeface="Calibri"/>
-              </a:rPr>
-              <a:t>–   Post-it: </a:t>
-            </a:r>
-            <a:r>
-              <a:rPr sz="1400" b="1" i="0">
+              <a:rPr sz="1300" b="0" i="0">
+                <a:solidFill>
+                  <a:srgbClr val="2B2B2B"/>
+                </a:solidFill>
+                <a:latin typeface="Calibri"/>
+              </a:rPr>
+              <a:t>–   </a:t>
+            </a:r>
+            <a:r>
+              <a:rPr sz="1300" b="1" i="0">
+                <a:solidFill>
+                  <a:srgbClr val="2B2B2B"/>
+                </a:solidFill>
+                <a:latin typeface="Calibri"/>
+              </a:rPr>
+              <a:t>Qué respondes (1 min):</a:t>
+            </a:r>
+            <a:r>
+              <a:rPr sz="1300" b="0" i="0">
+                <a:solidFill>
+                  <a:srgbClr val="2B2B2B"/>
+                </a:solidFill>
+                <a:latin typeface="Calibri"/>
+              </a:rPr>
+              <a:t> tu </a:t>
+            </a:r>
+            <a:r>
+              <a:rPr sz="1300" b="1" i="0">
                 <a:solidFill>
                   <a:srgbClr val="2B2B2B"/>
                 </a:solidFill>
@@ -4776,31 +4864,67 @@
               <a:t>nombre</a:t>
             </a:r>
             <a:r>
-              <a:rPr sz="1400" b="0" i="0">
-                <a:solidFill>
-                  <a:srgbClr val="2B2B2B"/>
-                </a:solidFill>
-                <a:latin typeface="Calibri"/>
-              </a:rPr>
-              <a:t> + </a:t>
-            </a:r>
-            <a:r>
-              <a:rPr sz="1400" b="1" i="0">
-                <a:solidFill>
-                  <a:srgbClr val="2B2B2B"/>
-                </a:solidFill>
-                <a:latin typeface="Calibri"/>
-              </a:rPr>
-              <a:t>tema del artículo</a:t>
-            </a:r>
-            <a:r>
-              <a:rPr sz="1400" b="0" i="0">
-                <a:solidFill>
-                  <a:srgbClr val="2B2B2B"/>
-                </a:solidFill>
-                <a:latin typeface="Calibri"/>
-              </a:rPr>
-              <a:t> (1 frase) + expectativa del semestre.</a:t>
+              <a:rPr sz="1300" b="0" i="0">
+                <a:solidFill>
+                  <a:srgbClr val="2B2B2B"/>
+                </a:solidFill>
+                <a:latin typeface="Calibri"/>
+              </a:rPr>
+              <a:t> + el </a:t>
+            </a:r>
+            <a:r>
+              <a:rPr sz="1300" b="1" i="0">
+                <a:solidFill>
+                  <a:srgbClr val="2B2B2B"/>
+                </a:solidFill>
+                <a:latin typeface="Calibri"/>
+              </a:rPr>
+              <a:t>tema de tu artículo</a:t>
+            </a:r>
+            <a:r>
+              <a:rPr sz="1300" b="0" i="0">
+                <a:solidFill>
+                  <a:srgbClr val="2B2B2B"/>
+                </a:solidFill>
+                <a:latin typeface="Calibri"/>
+              </a:rPr>
+              <a:t> (1 frase) + tu </a:t>
+            </a:r>
+            <a:r>
+              <a:rPr sz="1300" b="1" i="0">
+                <a:solidFill>
+                  <a:srgbClr val="2B2B2B"/>
+                </a:solidFill>
+                <a:latin typeface="Calibri"/>
+              </a:rPr>
+              <a:t>expectativa del semestre</a:t>
+            </a:r>
+            <a:r>
+              <a:rPr sz="1300" b="0" i="0">
+                <a:solidFill>
+                  <a:srgbClr val="2B2B2B"/>
+                </a:solidFill>
+                <a:latin typeface="Calibri"/>
+              </a:rPr>
+              <a:t>. Entras con tu correo </a:t>
+            </a:r>
+            <a:r>
+              <a:rPr sz="1300" b="1" i="0">
+                <a:solidFill>
+                  <a:srgbClr val="2B2B2B"/>
+                </a:solidFill>
+                <a:latin typeface="Calibri"/>
+              </a:rPr>
+              <a:t>@cun.edu.co</a:t>
+            </a:r>
+            <a:r>
+              <a:rPr sz="1300" b="0" i="0">
+                <a:solidFill>
+                  <a:srgbClr val="2B2B2B"/>
+                </a:solidFill>
+                <a:latin typeface="Calibri"/>
+              </a:rPr>
+              <a:t>: no hay que crear cuenta ni instalar nada.</a:t>
             </a:r>
           </a:p>
           <a:p>
@@ -4810,31 +4934,31 @@
               </a:spcAft>
             </a:pPr>
             <a:r>
-              <a:rPr sz="1400" b="0" i="0">
-                <a:solidFill>
-                  <a:srgbClr val="2B2B2B"/>
-                </a:solidFill>
-                <a:latin typeface="Calibri"/>
-              </a:rPr>
-              <a:t>–   Tablero oficial: </a:t>
-            </a:r>
-            <a:r>
-              <a:rPr sz="1400" b="1" i="0">
-                <a:solidFill>
-                  <a:srgbClr val="2B2B2B"/>
-                </a:solidFill>
-                <a:latin typeface="Calibri"/>
-              </a:rPr>
-              <a:t>Padlet</a:t>
-            </a:r>
-            <a:r>
-              <a:rPr sz="1400" b="0" i="0">
-                <a:solidFill>
-                  <a:srgbClr val="2B2B2B"/>
-                </a:solidFill>
-                <a:latin typeface="Calibri"/>
-              </a:rPr>
-              <a:t> (mismo enlace en los 5 cursos).</a:t>
+              <a:rPr sz="1300" b="0" i="0">
+                <a:solidFill>
+                  <a:srgbClr val="2B2B2B"/>
+                </a:solidFill>
+                <a:latin typeface="Calibri"/>
+              </a:rPr>
+              <a:t>–   </a:t>
+            </a:r>
+            <a:r>
+              <a:rPr sz="1300" b="1" i="0">
+                <a:solidFill>
+                  <a:srgbClr val="2B2B2B"/>
+                </a:solidFill>
+                <a:latin typeface="Calibri"/>
+              </a:rPr>
+              <a:t>Ahora, ~3 min.</a:t>
+            </a:r>
+            <a:r>
+              <a:rPr sz="1300" b="0" i="0">
+                <a:solidFill>
+                  <a:srgbClr val="2B2B2B"/>
+                </a:solidFill>
+                <a:latin typeface="Calibri"/>
+              </a:rPr>
+              <a:t> Somos 112: no alcanzamos a presentarnos uno por uno, así que el formulario nos ordena.</a:t>
             </a:r>
           </a:p>
           <a:p>
@@ -4844,13 +4968,171 @@
               </a:spcAft>
             </a:pPr>
             <a:r>
-              <a:rPr sz="1400" b="0" i="0">
-                <a:solidFill>
-                  <a:srgbClr val="2B2B2B"/>
-                </a:solidFill>
-                <a:latin typeface="Calibri"/>
-              </a:rPr>
-              <a:t>–   Ahora (~7 min). Leemos juntos 3–4 notas (sin juzgar).</a:t>
+              <a:rPr sz="1300" b="0" i="0">
+                <a:solidFill>
+                  <a:srgbClr val="2B2B2B"/>
+                </a:solidFill>
+                <a:latin typeface="Calibri"/>
+              </a:rPr>
+              <a:t>–   </a:t>
+            </a:r>
+            <a:r>
+              <a:rPr sz="1300" b="1" i="0">
+                <a:solidFill>
+                  <a:srgbClr val="2B2B2B"/>
+                </a:solidFill>
+                <a:latin typeface="Calibri"/>
+              </a:rPr>
+              <a:t>Con eso, hoy:</a:t>
+            </a:r>
+            <a:r>
+              <a:rPr sz="1300" b="0" i="0">
+                <a:solidFill>
+                  <a:srgbClr val="2B2B2B"/>
+                </a:solidFill>
+                <a:latin typeface="Calibri"/>
+              </a:rPr>
+              <a:t> el Docente lee en voz alta </a:t>
+            </a:r>
+            <a:r>
+              <a:rPr sz="1300" b="1" i="0">
+                <a:solidFill>
+                  <a:srgbClr val="2B2B2B"/>
+                </a:solidFill>
+                <a:latin typeface="Calibri"/>
+              </a:rPr>
+              <a:t>5 o 6 respuestas</a:t>
+            </a:r>
+            <a:r>
+              <a:rPr sz="1300" b="0" i="0">
+                <a:solidFill>
+                  <a:srgbClr val="2B2B2B"/>
+                </a:solidFill>
+                <a:latin typeface="Calibri"/>
+              </a:rPr>
+              <a:t> y proyecta el </a:t>
+            </a:r>
+            <a:r>
+              <a:rPr sz="1300" b="1" i="0">
+                <a:solidFill>
+                  <a:srgbClr val="2B2B2B"/>
+                </a:solidFill>
+                <a:latin typeface="Calibri"/>
+              </a:rPr>
+              <a:t>resumen</a:t>
+            </a:r>
+            <a:r>
+              <a:rPr sz="1300" b="0" i="0">
+                <a:solidFill>
+                  <a:srgbClr val="2B2B2B"/>
+                </a:solidFill>
+                <a:latin typeface="Calibri"/>
+              </a:rPr>
+              <a:t> del formulario — ahí quedan todas a la vista, no solo las leídas.</a:t>
+            </a:r>
+          </a:p>
+          <a:p>
+            <a:pPr>
+              <a:spcAft>
+                <a:spcPts val="1000"/>
+              </a:spcAft>
+            </a:pPr>
+            <a:r>
+              <a:rPr sz="1300" b="0" i="0">
+                <a:solidFill>
+                  <a:srgbClr val="2B2B2B"/>
+                </a:solidFill>
+                <a:latin typeface="Calibri"/>
+              </a:rPr>
+              <a:t>–   </a:t>
+            </a:r>
+            <a:r>
+              <a:rPr sz="1300" b="1" i="0">
+                <a:solidFill>
+                  <a:srgbClr val="2B2B2B"/>
+                </a:solidFill>
+                <a:latin typeface="Calibri"/>
+              </a:rPr>
+              <a:t>En vivo:</a:t>
+            </a:r>
+            <a:r>
+              <a:rPr sz="1300" b="0" i="0">
+                <a:solidFill>
+                  <a:srgbClr val="2B2B2B"/>
+                </a:solidFill>
+                <a:latin typeface="Calibri"/>
+              </a:rPr>
+              <a:t> las preguntas y las votaciones van por la </a:t>
+            </a:r>
+            <a:r>
+              <a:rPr sz="1300" b="1" i="0">
+                <a:solidFill>
+                  <a:srgbClr val="2B2B2B"/>
+                </a:solidFill>
+                <a:latin typeface="Calibri"/>
+              </a:rPr>
+              <a:t>encuesta</a:t>
+            </a:r>
+            <a:r>
+              <a:rPr sz="1300" b="0" i="0">
+                <a:solidFill>
+                  <a:srgbClr val="2B2B2B"/>
+                </a:solidFill>
+                <a:latin typeface="Calibri"/>
+              </a:rPr>
+              <a:t> y el </a:t>
+            </a:r>
+            <a:r>
+              <a:rPr sz="1300" b="1" i="0">
+                <a:solidFill>
+                  <a:srgbClr val="2B2B2B"/>
+                </a:solidFill>
+                <a:latin typeface="Calibri"/>
+              </a:rPr>
+              <a:t>Q&amp;A</a:t>
+            </a:r>
+            <a:r>
+              <a:rPr sz="1300" b="0" i="0">
+                <a:solidFill>
+                  <a:srgbClr val="2B2B2B"/>
+                </a:solidFill>
+                <a:latin typeface="Calibri"/>
+              </a:rPr>
+              <a:t> del propio Meet; no hay que abrir ninguna otra plataforma.</a:t>
+            </a:r>
+          </a:p>
+          <a:p>
+            <a:pPr>
+              <a:spcAft>
+                <a:spcPts val="1000"/>
+              </a:spcAft>
+            </a:pPr>
+            <a:r>
+              <a:rPr sz="1300" b="0" i="0">
+                <a:solidFill>
+                  <a:srgbClr val="2B2B2B"/>
+                </a:solidFill>
+                <a:latin typeface="Calibri"/>
+              </a:rPr>
+              <a:t>–   </a:t>
+            </a:r>
+            <a:r>
+              <a:rPr sz="1300" b="1" i="0">
+                <a:solidFill>
+                  <a:srgbClr val="2B2B2B"/>
+                </a:solidFill>
+                <a:latin typeface="Calibri"/>
+              </a:rPr>
+              <a:t>Después:</a:t>
+            </a:r>
+            <a:r>
+              <a:rPr sz="1300" b="0" i="0">
+                <a:solidFill>
+                  <a:srgbClr val="2B2B2B"/>
+                </a:solidFill>
+                <a:latin typeface="Calibri"/>
+              </a:rPr>
+              <a:t> las respuestas quedan en una hoja que el Docente usa todo el periodo (equipos, ejemplos y seguimiento).</a:t>
             </a:r>
           </a:p>
         </p:txBody>
@@ -4899,40 +5181,16 @@
           </a:p>
         </p:txBody>
       </p:sp>
-      <p:pic>
-        <p:nvPicPr>
-          <p:cNvPr id="7" name="Picture 6" descr="qr_presentacion_estudiantes.png"/>
-          <p:cNvPicPr>
-            <a:picLocks noChangeAspect="1"/>
-          </p:cNvPicPr>
-          <p:nvPr/>
-        </p:nvPicPr>
-        <p:blipFill>
-          <a:blip r:embed="rId2"/>
-          <a:stretch>
-            <a:fillRect/>
-          </a:stretch>
-        </p:blipFill>
-        <p:spPr>
-          <a:xfrm>
-            <a:off x="8442655" y="2103120"/>
-            <a:ext cx="3108960" cy="3108960"/>
-          </a:xfrm>
-          <a:prstGeom prst="rect">
-            <a:avLst/>
-          </a:prstGeom>
-        </p:spPr>
-      </p:pic>
-      <p:sp>
-        <p:nvSpPr>
-          <p:cNvPr id="8" name="TextBox 7"/>
+      <p:sp>
+        <p:nvSpPr>
+          <p:cNvPr id="7" name="TextBox 6"/>
           <p:cNvSpPr txBox="1"/>
           <p:nvPr/>
         </p:nvSpPr>
         <p:spPr>
           <a:xfrm>
-            <a:off x="8332927" y="5230367"/>
-            <a:ext cx="3328415" cy="256032"/>
+            <a:off x="8579815" y="2926079"/>
+            <a:ext cx="2834640" cy="1463040"/>
           </a:xfrm>
           <a:prstGeom prst="rect">
             <a:avLst/>
@@ -4940,34 +5198,50 @@
           <a:noFill/>
         </p:spPr>
         <p:txBody>
-          <a:bodyPr wrap="square" anchor="t" lIns="0" rIns="0" tIns="0" bIns="0">
+          <a:bodyPr wrap="square" anchor="ctr" lIns="0" rIns="0" tIns="0" bIns="0">
             <a:spAutoFit/>
           </a:bodyPr>
           <a:lstStyle/>
           <a:p>
             <a:pPr algn="ctr"/>
             <a:r>
-              <a:rPr sz="1200" b="1" i="0">
+              <a:rPr sz="1800" b="1" i="0">
                 <a:solidFill>
                   <a:srgbClr val="0C2340"/>
                 </a:solidFill>
                 <a:latin typeface="Calibri"/>
               </a:rPr>
-              <a:t>Escanea o abre</a:t>
-            </a:r>
-          </a:p>
-        </p:txBody>
-      </p:sp>
-      <p:sp>
-        <p:nvSpPr>
-          <p:cNvPr id="9" name="TextBox 8"/>
+              <a:t>QR pendiente</a:t>
+            </a:r>
+          </a:p>
+          <a:p>
+            <a:pPr algn="ctr">
+              <a:spcBef>
+                <a:spcPts val="1000"/>
+              </a:spcBef>
+            </a:pPr>
+            <a:r>
+              <a:rPr sz="1200" b="0" i="0">
+                <a:solidFill>
+                  <a:srgbClr val="2B2B2B"/>
+                </a:solidFill>
+                <a:latin typeface="Calibri"/>
+              </a:rPr>
+              <a:t>Se genera cuando el formulario tenga enlace real.</a:t>
+            </a:r>
+          </a:p>
+        </p:txBody>
+      </p:sp>
+      <p:sp>
+        <p:nvSpPr>
+          <p:cNvPr id="8" name="TextBox 7"/>
           <p:cNvSpPr txBox="1"/>
           <p:nvPr/>
         </p:nvSpPr>
         <p:spPr>
           <a:xfrm>
-            <a:off x="8332927" y="5468112"/>
-            <a:ext cx="3328415" cy="411480"/>
+            <a:off x="8332927" y="5230367"/>
+            <a:ext cx="3328415" cy="640080"/>
           </a:xfrm>
           <a:prstGeom prst="rect">
             <a:avLst/>
@@ -4988,14 +5262,14 @@
                 </a:solidFill>
                 <a:latin typeface="Calibri"/>
               </a:rPr>
-              <a:t>https://padlet.com/andres_dfx/cun-wruz81hmf9k06gd7</a:t>
-            </a:r>
-          </a:p>
-        </p:txBody>
-      </p:sp>
-      <p:sp>
-        <p:nvSpPr>
-          <p:cNvPr id="10" name="TextBox 9"/>
+              <a:t>[URL Formulario Preséntate — pendiente · TRABAJO DE GRADO 3]</a:t>
+            </a:r>
+          </a:p>
+        </p:txBody>
+      </p:sp>
+      <p:sp>
+        <p:nvSpPr>
+          <p:cNvPr id="9" name="TextBox 8"/>
           <p:cNvSpPr txBox="1"/>
           <p:nvPr/>
         </p:nvSpPr>
@@ -6929,7 +7203,7 @@
                 </a:solidFill>
                 <a:latin typeface="Calibri"/>
               </a:rPr>
-              <a:t>17/11/2026</a:t>
+              <a:t>10/11/2026</a:t>
             </a:r>
           </a:p>
         </p:txBody>
@@ -7070,7 +7344,7 @@
                 </a:solidFill>
                 <a:latin typeface="Calibri"/>
               </a:rPr>
-              <a:t>14/11/2026</a:t>
+              <a:t>07/11/2026</a:t>
             </a:r>
             <a:r>
               <a:rPr sz="1200" b="0" i="0">
@@ -7124,7 +7398,7 @@
                 </a:solidFill>
                 <a:latin typeface="Calibri"/>
               </a:rPr>
-              <a:t>14/11/2026</a:t>
+              <a:t>07/11/2026</a:t>
             </a:r>
             <a:r>
               <a:rPr sz="1200" b="0" i="0">
@@ -8083,7 +8357,7 @@
                           </a:solidFill>
                           <a:latin typeface="Calibri"/>
                         </a:rPr>
-                        <a:t>07/11/2026 (54450) · 14/11/2026 (54466/54467)</a:t>
+                        <a:t>07/11/2026</a:t>
                       </a:r>
                     </a:p>
                   </a:txBody>
@@ -8317,7 +8591,7 @@
                           </a:solidFill>
                           <a:latin typeface="Calibri"/>
                         </a:rPr>
-                        <a:t>10/11/2026 (54450) · 17/11/2026 (54466/54467)</a:t>
+                        <a:t>10/11/2026</a:t>
                       </a:r>
                     </a:p>
                   </a:txBody>
@@ -8434,7 +8708,7 @@
                           </a:solidFill>
                           <a:latin typeface="Calibri"/>
                         </a:rPr>
-                        <a:t>10/11/2026 (54450) · 17/11/2026 (54466/54467)</a:t>
+                        <a:t>10/11/2026</a:t>
                       </a:r>
                     </a:p>
                   </a:txBody>
@@ -9183,7 +9457,7 @@
         <p:spPr>
           <a:xfrm>
             <a:off x="640080" y="2679191"/>
-            <a:ext cx="10911535" cy="713232"/>
+            <a:ext cx="10911535" cy="1225296"/>
           </a:xfrm>
           <a:prstGeom prst="roundRect">
             <a:avLst/>
@@ -9227,7 +9501,7 @@
         <p:spPr>
           <a:xfrm>
             <a:off x="868680" y="2788920"/>
-            <a:ext cx="10454335" cy="493776"/>
+            <a:ext cx="10454335" cy="1005840"/>
           </a:xfrm>
           <a:prstGeom prst="rect">
             <a:avLst/>
@@ -9281,7 +9555,43 @@
                 </a:solidFill>
                 <a:latin typeface="Calibri"/>
               </a:rPr>
-              <a:t> (avance guiado en el CDigital).</a:t>
+              <a:t>: el avance guiado queda en la </a:t>
+            </a:r>
+            <a:r>
+              <a:rPr sz="1300" b="1" i="0">
+                <a:solidFill>
+                  <a:srgbClr val="2B2B2B"/>
+                </a:solidFill>
+                <a:latin typeface="Calibri"/>
+              </a:rPr>
+              <a:t>carpeta de esa sesión en el Drive de clases</a:t>
+            </a:r>
+            <a:r>
+              <a:rPr sz="1300" b="0" i="0">
+                <a:solidFill>
+                  <a:srgbClr val="2B2B2B"/>
+                </a:solidFill>
+                <a:latin typeface="Calibri"/>
+              </a:rPr>
+              <a:t> (`Clases/Sesion NN - …/`); la entrega y la nota siguen en </a:t>
+            </a:r>
+            <a:r>
+              <a:rPr sz="1300" b="1" i="0">
+                <a:solidFill>
+                  <a:srgbClr val="2B2B2B"/>
+                </a:solidFill>
+                <a:latin typeface="Calibri"/>
+              </a:rPr>
+              <a:t>CDigital</a:t>
+            </a:r>
+            <a:r>
+              <a:rPr sz="1300" b="0" i="0">
+                <a:solidFill>
+                  <a:srgbClr val="2B2B2B"/>
+                </a:solidFill>
+                <a:latin typeface="Calibri"/>
+              </a:rPr>
+              <a:t>.</a:t>
             </a:r>
           </a:p>
         </p:txBody>
@@ -9294,7 +9604,7 @@
         </p:nvSpPr>
         <p:spPr>
           <a:xfrm>
-            <a:off x="640080" y="3621024"/>
+            <a:off x="640080" y="4133087"/>
             <a:ext cx="10911535" cy="713232"/>
           </a:xfrm>
           <a:prstGeom prst="roundRect">
@@ -9338,7 +9648,7 @@
         </p:nvSpPr>
         <p:spPr>
           <a:xfrm>
-            <a:off x="868680" y="3730752"/>
+            <a:off x="868680" y="4242816"/>
             <a:ext cx="10454335" cy="493776"/>
           </a:xfrm>
           <a:prstGeom prst="rect">

--- a/Pregrado/Trabajo de grado 3/Clases/Presentacion del Curso - Trabajo de Grado 3.pptx
+++ b/Pregrado/Trabajo de grado 3/Clases/Presentacion del Curso - Trabajo de Grado 3.pptx
@@ -4726,7 +4726,7 @@
                 </a:solidFill>
                 <a:latin typeface="Calibri"/>
               </a:rPr>
-              <a:t>PRESÉNTATE — ROMPEHIELOS</a:t>
+              <a:t>ROMPEHIELOS — DOS VERDADES Y UNA MENTIRA</a:t>
             </a:r>
           </a:p>
         </p:txBody>
@@ -4761,7 +4761,7 @@
                 </a:solidFill>
                 <a:latin typeface="Calibri"/>
               </a:rPr>
-              <a:t>Formulario de Google · encuestas y Q&amp;A en el propio Meet</a:t>
+              <a:t>Dos verdades y una mentira · Slido · 8 minutos</a:t>
             </a:r>
           </a:p>
         </p:txBody>
@@ -4809,7 +4809,7 @@
                 </a:solidFill>
                 <a:latin typeface="Calibri"/>
               </a:rPr>
-              <a:t>Escanea el QR o abre:</a:t>
+              <a:t>Entra a slido.com</a:t>
             </a:r>
             <a:r>
               <a:rPr sz="1300" b="0" i="0">
@@ -4818,7 +4818,25 @@
                 </a:solidFill>
                 <a:latin typeface="Calibri"/>
               </a:rPr>
-              <a:t> [URL Formulario Preséntate — pendiente · TRABAJO DE GRADO 3]</a:t>
+              <a:t> y escribe el </a:t>
+            </a:r>
+            <a:r>
+              <a:rPr sz="1300" b="1" i="0">
+                <a:solidFill>
+                  <a:srgbClr val="2B2B2B"/>
+                </a:solidFill>
+                <a:latin typeface="Calibri"/>
+              </a:rPr>
+              <a:t>código del evento</a:t>
+            </a:r>
+            <a:r>
+              <a:rPr sz="1300" b="0" i="0">
+                <a:solidFill>
+                  <a:srgbClr val="2B2B2B"/>
+                </a:solidFill>
+                <a:latin typeface="Calibri"/>
+              </a:rPr>
+              <a:t> que el Docente pega en el chat del Meet. Sin cuenta ni instalar nada.</a:t>
             </a:r>
           </a:p>
           <a:p>
@@ -4843,7 +4861,7 @@
                 </a:solidFill>
                 <a:latin typeface="Calibri"/>
               </a:rPr>
-              <a:t>Qué respondes (1 min):</a:t>
+              <a:t>El juego:</a:t>
             </a:r>
             <a:r>
               <a:rPr sz="1300" b="0" i="0">
@@ -4852,7 +4870,7 @@
                 </a:solidFill>
                 <a:latin typeface="Calibri"/>
               </a:rPr>
-              <a:t> tu </a:t>
+              <a:t> «</a:t>
             </a:r>
             <a:r>
               <a:rPr sz="1300" b="1" i="0">
@@ -4861,7 +4879,7 @@
                 </a:solidFill>
                 <a:latin typeface="Calibri"/>
               </a:rPr>
-              <a:t>nombre</a:t>
+              <a:t>dos verdades y una mentira</a:t>
             </a:r>
             <a:r>
               <a:rPr sz="1300" b="0" i="0">
@@ -4870,7 +4888,7 @@
                 </a:solidFill>
                 <a:latin typeface="Calibri"/>
               </a:rPr>
-              <a:t> + el </a:t>
+              <a:t>» sobre el Docente. Se proyectan tres frases suyas y votas </a:t>
             </a:r>
             <a:r>
               <a:rPr sz="1300" b="1" i="0">
@@ -4879,7 +4897,7 @@
                 </a:solidFill>
                 <a:latin typeface="Calibri"/>
               </a:rPr>
-              <a:t>tema de tu artículo</a:t>
+              <a:t>cuál de las tres NO es cierta</a:t>
             </a:r>
             <a:r>
               <a:rPr sz="1300" b="0" i="0">
@@ -4888,7 +4906,7 @@
                 </a:solidFill>
                 <a:latin typeface="Calibri"/>
               </a:rPr>
-              <a:t> (1 frase) + tu </a:t>
+              <a:t> — acertar es </a:t>
             </a:r>
             <a:r>
               <a:rPr sz="1300" b="1" i="0">
@@ -4897,7 +4915,7 @@
                 </a:solidFill>
                 <a:latin typeface="Calibri"/>
               </a:rPr>
-              <a:t>expectativa del semestre</a:t>
+              <a:t>1 entre 3</a:t>
             </a:r>
             <a:r>
               <a:rPr sz="1300" b="0" i="0">
@@ -4906,25 +4924,7 @@
                 </a:solidFill>
                 <a:latin typeface="Calibri"/>
               </a:rPr>
-              <a:t>. Entras con tu correo </a:t>
-            </a:r>
-            <a:r>
-              <a:rPr sz="1300" b="1" i="0">
-                <a:solidFill>
-                  <a:srgbClr val="2B2B2B"/>
-                </a:solidFill>
-                <a:latin typeface="Calibri"/>
-              </a:rPr>
-              <a:t>@cun.edu.co</a:t>
-            </a:r>
-            <a:r>
-              <a:rPr sz="1300" b="0" i="0">
-                <a:solidFill>
-                  <a:srgbClr val="2B2B2B"/>
-                </a:solidFill>
-                <a:latin typeface="Calibri"/>
-              </a:rPr>
-              <a:t>: no hay que crear cuenta ni instalar nada.</a:t>
+              <a:t>, así que arrancamos todos iguales.</a:t>
             </a:r>
           </a:p>
           <a:p>
@@ -4949,7 +4949,7 @@
                 </a:solidFill>
                 <a:latin typeface="Calibri"/>
               </a:rPr>
-              <a:t>Ahora, ~3 min.</a:t>
+              <a:t>Tres rondas (~4 min).</a:t>
             </a:r>
             <a:r>
               <a:rPr sz="1300" b="0" i="0">
@@ -4958,7 +4958,7 @@
                 </a:solidFill>
                 <a:latin typeface="Calibri"/>
               </a:rPr>
-              <a:t> Somos 112: no alcanzamos a presentarnos uno por uno, así que el formulario nos ordena.</a:t>
+              <a:t> Al cerrar cada una el Docente revela la mentira y cuenta la historia de la verdad más rara: ahí queda hecha su presentación.</a:t>
             </a:r>
           </a:p>
           <a:p>
@@ -4983,7 +4983,7 @@
                 </a:solidFill>
                 <a:latin typeface="Calibri"/>
               </a:rPr>
-              <a:t>Con eso, hoy:</a:t>
+              <a:t>Ronda final (~2 min):</a:t>
             </a:r>
             <a:r>
               <a:rPr sz="1300" b="0" i="0">
@@ -4992,7 +4992,7 @@
                 </a:solidFill>
                 <a:latin typeface="Calibri"/>
               </a:rPr>
-              <a:t> el Docente lee en voz alta </a:t>
+              <a:t> sale la tabla de posiciones y los </a:t>
             </a:r>
             <a:r>
               <a:rPr sz="1300" b="1" i="0">
@@ -5001,7 +5001,7 @@
                 </a:solidFill>
                 <a:latin typeface="Calibri"/>
               </a:rPr>
-              <a:t>5 o 6 respuestas</a:t>
+              <a:t>tres primeros</a:t>
             </a:r>
             <a:r>
               <a:rPr sz="1300" b="0" i="0">
@@ -5010,7 +5010,7 @@
                 </a:solidFill>
                 <a:latin typeface="Calibri"/>
               </a:rPr>
-              <a:t> y proyecta el </a:t>
+              <a:t> toman el micrófono con </a:t>
             </a:r>
             <a:r>
               <a:rPr sz="1300" b="1" i="0">
@@ -5019,7 +5019,7 @@
                 </a:solidFill>
                 <a:latin typeface="Calibri"/>
               </a:rPr>
-              <a:t>resumen</a:t>
+              <a:t>sus</a:t>
             </a:r>
             <a:r>
               <a:rPr sz="1300" b="0" i="0">
@@ -5028,7 +5028,7 @@
                 </a:solidFill>
                 <a:latin typeface="Calibri"/>
               </a:rPr>
-              <a:t> del formulario — ahí quedan todas a la vista, no solo las leídas.</a:t>
+              <a:t> dos verdades y una mentira. Gana quien engañe a más gente. Hablan tres, no 112.</a:t>
             </a:r>
           </a:p>
           <a:p>
@@ -5053,7 +5053,7 @@
                 </a:solidFill>
                 <a:latin typeface="Calibri"/>
               </a:rPr>
-              <a:t>En vivo:</a:t>
+              <a:t>Premio:</a:t>
             </a:r>
             <a:r>
               <a:rPr sz="1300" b="0" i="0">
@@ -5062,7 +5062,7 @@
                 </a:solidFill>
                 <a:latin typeface="Calibri"/>
               </a:rPr>
-              <a:t> las preguntas y las votaciones van por la </a:t>
+              <a:t> </a:t>
             </a:r>
             <a:r>
               <a:rPr sz="1300" b="1" i="0">
@@ -5071,7 +5071,7 @@
                 </a:solidFill>
                 <a:latin typeface="Calibri"/>
               </a:rPr>
-              <a:t>encuesta</a:t>
+              <a:t>revisión 1 a 1 con el Docente</a:t>
             </a:r>
             <a:r>
               <a:rPr sz="1300" b="0" i="0">
@@ -5080,25 +5080,7 @@
                 </a:solidFill>
                 <a:latin typeface="Calibri"/>
               </a:rPr>
-              <a:t> y el </a:t>
-            </a:r>
-            <a:r>
-              <a:rPr sz="1300" b="1" i="0">
-                <a:solidFill>
-                  <a:srgbClr val="2B2B2B"/>
-                </a:solidFill>
-                <a:latin typeface="Calibri"/>
-              </a:rPr>
-              <a:t>Q&amp;A</a:t>
-            </a:r>
-            <a:r>
-              <a:rPr sz="1300" b="0" i="0">
-                <a:solidFill>
-                  <a:srgbClr val="2B2B2B"/>
-                </a:solidFill>
-                <a:latin typeface="Calibri"/>
-              </a:rPr>
-              <a:t> del propio Meet; no hay que abrir ninguna otra plataforma.</a:t>
+              <a:t> del avance del ganador, antes de la primera entrega.</a:t>
             </a:r>
           </a:p>
           <a:p>
@@ -5123,7 +5105,7 @@
                 </a:solidFill>
                 <a:latin typeface="Calibri"/>
               </a:rPr>
-              <a:t>Después:</a:t>
+              <a:t>Las preguntas</a:t>
             </a:r>
             <a:r>
               <a:rPr sz="1300" b="0" i="0">
@@ -5132,7 +5114,25 @@
                 </a:solidFill>
                 <a:latin typeface="Calibri"/>
               </a:rPr>
-              <a:t> las respuestas quedan en una hoja que el Docente usa todo el periodo (equipos, ejemplos y seguimiento).</a:t>
+              <a:t> de toda la sesión van por el </a:t>
+            </a:r>
+            <a:r>
+              <a:rPr sz="1300" b="1" i="0">
+                <a:solidFill>
+                  <a:srgbClr val="2B2B2B"/>
+                </a:solidFill>
+                <a:latin typeface="Calibri"/>
+              </a:rPr>
+              <a:t>Q&amp;A</a:t>
+            </a:r>
+            <a:r>
+              <a:rPr sz="1300" b="0" i="0">
+                <a:solidFill>
+                  <a:srgbClr val="2B2B2B"/>
+                </a:solidFill>
+                <a:latin typeface="Calibri"/>
+              </a:rPr>
+              <a:t> del mismo Slido.</a:t>
             </a:r>
           </a:p>
         </p:txBody>
@@ -5189,8 +5189,8 @@
         </p:nvSpPr>
         <p:spPr>
           <a:xfrm>
-            <a:off x="8579815" y="2926079"/>
-            <a:ext cx="2834640" cy="1463040"/>
+            <a:off x="8534095" y="2606039"/>
+            <a:ext cx="2926079" cy="2103120"/>
           </a:xfrm>
           <a:prstGeom prst="rect">
             <a:avLst/>
@@ -5205,29 +5205,65 @@
           <a:p>
             <a:pPr algn="ctr"/>
             <a:r>
-              <a:rPr sz="1800" b="1" i="0">
-                <a:solidFill>
-                  <a:srgbClr val="0C2340"/>
-                </a:solidFill>
-                <a:latin typeface="Calibri"/>
-              </a:rPr>
-              <a:t>QR pendiente</a:t>
+              <a:rPr sz="3000" b="1" i="0">
+                <a:solidFill>
+                  <a:srgbClr val="007433"/>
+                </a:solidFill>
+                <a:latin typeface="Calibri"/>
+              </a:rPr>
+              <a:t>slido.com</a:t>
             </a:r>
           </a:p>
           <a:p>
             <a:pPr algn="ctr">
               <a:spcBef>
-                <a:spcPts val="1000"/>
+                <a:spcPts val="1400"/>
               </a:spcBef>
             </a:pPr>
             <a:r>
-              <a:rPr sz="1200" b="0" i="0">
-                <a:solidFill>
-                  <a:srgbClr val="2B2B2B"/>
-                </a:solidFill>
-                <a:latin typeface="Calibri"/>
-              </a:rPr>
-              <a:t>Se genera cuando el formulario tenga enlace real.</a:t>
+              <a:rPr sz="1300" b="0" i="0">
+                <a:solidFill>
+                  <a:srgbClr val="0C2340"/>
+                </a:solidFill>
+                <a:latin typeface="Calibri"/>
+              </a:rPr>
+              <a:t>El </a:t>
+            </a:r>
+            <a:r>
+              <a:rPr sz="1300" b="1" i="0">
+                <a:solidFill>
+                  <a:srgbClr val="0C2340"/>
+                </a:solidFill>
+                <a:latin typeface="Calibri"/>
+              </a:rPr>
+              <a:t>código del evento</a:t>
+            </a:r>
+            <a:r>
+              <a:rPr sz="1300" b="0" i="0">
+                <a:solidFill>
+                  <a:srgbClr val="0C2340"/>
+                </a:solidFill>
+                <a:latin typeface="Calibri"/>
+              </a:rPr>
+              <a:t> te lo pega el Docente en el </a:t>
+            </a:r>
+            <a:r>
+              <a:rPr sz="1300" b="1" i="0">
+                <a:solidFill>
+                  <a:srgbClr val="0C2340"/>
+                </a:solidFill>
+                <a:latin typeface="Calibri"/>
+              </a:rPr>
+              <a:t>chat del Meet</a:t>
+            </a:r>
+            <a:r>
+              <a:rPr sz="1300" b="0" i="0">
+                <a:solidFill>
+                  <a:srgbClr val="0C2340"/>
+                </a:solidFill>
+                <a:latin typeface="Calibri"/>
+              </a:rPr>
+              <a:t>.</a:t>
             </a:r>
           </a:p>
         </p:txBody>
@@ -5262,7 +5298,7 @@
                 </a:solidFill>
                 <a:latin typeface="Calibri"/>
               </a:rPr>
-              <a:t>[URL Formulario Preséntate — pendiente · TRABAJO DE GRADO 3]</a:t>
+              <a:t>[URL Slido — evento del rompehielos pendiente · TRABAJO DE GRADO 3]</a:t>
             </a:r>
           </a:p>
         </p:txBody>
